--- a/project_41_fruit_quality_grading/presentations/project_presentation.pptx
+++ b/project_41_fruit_quality_grading/presentations/project_presentation.pptx
@@ -13,6 +13,13 @@
     <p:sldId id="261" r:id="rId12"/>
     <p:sldId id="262" r:id="rId13"/>
     <p:sldId id="263" r:id="rId14"/>
+    <p:sldId id="264" r:id="rId15"/>
+    <p:sldId id="265" r:id="rId16"/>
+    <p:sldId id="266" r:id="rId17"/>
+    <p:sldId id="267" r:id="rId18"/>
+    <p:sldId id="268" r:id="rId19"/>
+    <p:sldId id="269" r:id="rId20"/>
+    <p:sldId id="270" r:id="rId21"/>
   </p:sldIdLst>
   <p:sldSz cx="12191695" cy="6858000" type="screen4x3"/>
   <p:notesSz cx="6858000" cy="9144000"/>
@@ -3146,8 +3153,8 @@
         </p:nvSpPr>
         <p:spPr>
           <a:xfrm>
-            <a:off x="1097280" y="1645920"/>
-            <a:ext cx="10058400" cy="3474720"/>
+            <a:off x="914400" y="1645920"/>
+            <a:ext cx="10362895" cy="3657600"/>
           </a:xfrm>
           <a:prstGeom prst="rect">
             <a:avLst/>
@@ -3160,15 +3167,29 @@
           </a:bodyPr>
           <a:lstStyle/>
           <a:p>
+            <a:r>
+              <a:rPr b="1" sz="1200">
+                <a:solidFill>
+                  <a:srgbClr val="10B981"/>
+                </a:solidFill>
+              </a:rPr>
+              <a:t>COLLEGE CAPSTONE ENGINEERING PORTFOLIO • PROJECT-041</a:t>
+            </a:r>
+          </a:p>
+          <a:p>
             <a:pPr>
-              <a:defRPr sz="1400" b="1">
-                <a:solidFill>
-                  <a:srgbClr val="38BDF8"/>
-                </a:solidFill>
-              </a:defRPr>
+              <a:spcBef>
+                <a:spcPts val="1200"/>
+              </a:spcBef>
             </a:pPr>
             <a:r>
-              <a:t>PROJECT 41 OF 55  •  RESEARCH &amp; IMPLEMENTATION DECK</a:t>
+              <a:rPr b="1" sz="3200">
+                <a:solidFill>
+                  <a:srgbClr val="FFFFFF"/>
+                </a:solidFill>
+              </a:rPr>
+              <a:t>Autonomous Fruit Quality Grading &amp;
+High-Speed Conveyor Defect Sorter</a:t>
             </a:r>
           </a:p>
           <a:p>
@@ -3176,29 +3197,2270 @@
               <a:spcBef>
                 <a:spcPts val="1400"/>
               </a:spcBef>
-              <a:defRPr sz="3200" b="1">
-                <a:solidFill>
-                  <a:srgbClr val="FFFFFF"/>
-                </a:solidFill>
-              </a:defRPr>
             </a:pPr>
             <a:r>
-              <a:t>AI-BASED FRUIT QUALITY GRADING AND DEFECT DETECTION USING COMPUTER VISION</a:t>
+              <a:rPr sz="1400">
+                <a:solidFill>
+                  <a:srgbClr val="94A3B8"/>
+                </a:solidFill>
+              </a:rPr>
+              <a:t>Multi-Task ConvNet • Neural Freshness &amp; Shelf-Life Regressor • Pneumatic Diverter Interlocks • SQLite WAL • Port 5041</a:t>
+            </a:r>
+          </a:p>
+        </p:txBody>
+      </p:sp>
+    </p:spTree>
+  </p:cSld>
+  <p:clrMapOvr>
+    <a:masterClrMapping/>
+  </p:clrMapOvr>
+</p:sld>
+</file>
+
+<file path=ppt/slides/slide10.xml><?xml version="1.0" encoding="utf-8"?>
+<p:sld xmlns:a="http://schemas.openxmlformats.org/drawingml/2006/main" xmlns:p="http://schemas.openxmlformats.org/presentationml/2006/main" xmlns:r="http://schemas.openxmlformats.org/officeDocument/2006/relationships">
+  <p:cSld>
+    <p:spTree>
+      <p:nvGrpSpPr>
+        <p:cNvPr id="1" name=""/>
+        <p:cNvGrpSpPr/>
+        <p:nvPr/>
+      </p:nvGrpSpPr>
+      <p:grpSpPr/>
+      <p:sp>
+        <p:nvSpPr>
+          <p:cNvPr id="2" name="TextBox 1"/>
+          <p:cNvSpPr txBox="1"/>
+          <p:nvPr/>
+        </p:nvSpPr>
+        <p:spPr>
+          <a:xfrm>
+            <a:off x="731520" y="365760"/>
+            <a:ext cx="10728655" cy="822960"/>
+          </a:xfrm>
+          <a:prstGeom prst="rect">
+            <a:avLst/>
+          </a:prstGeom>
+          <a:noFill/>
+        </p:spPr>
+        <p:txBody>
+          <a:bodyPr wrap="square" lIns="0" tIns="0" rIns="0" bIns="0">
+            <a:spAutoFit/>
+          </a:bodyPr>
+          <a:lstStyle/>
+          <a:p>
+            <a:r>
+              <a:rPr b="1" sz="1000">
+                <a:solidFill>
+                  <a:srgbClr val="10B981"/>
+                </a:solidFill>
+              </a:rPr>
+              <a:t>TROPICAL FRUIT LINE • PROJECT-041</a:t>
+            </a:r>
+          </a:p>
+          <a:p>
+            <a:r>
+              <a:rPr b="1" sz="2000">
+                <a:solidFill>
+                  <a:srgbClr val="0F172A"/>
+                </a:solidFill>
+              </a:rPr>
+              <a:t>Tropical Mango Optical Evaluation &amp; Export Grading</a:t>
+            </a:r>
+          </a:p>
+        </p:txBody>
+      </p:sp>
+      <p:pic>
+        <p:nvPicPr>
+          <p:cNvPr id="3" name="Picture 2" descr="06_mango_premium_export_grader.png"/>
+          <p:cNvPicPr>
+            <a:picLocks noChangeAspect="1"/>
+          </p:cNvPicPr>
+          <p:nvPr/>
+        </p:nvPicPr>
+        <p:blipFill>
+          <a:blip r:embed="rId2"/>
+          <a:stretch>
+            <a:fillRect/>
+          </a:stretch>
+        </p:blipFill>
+        <p:spPr>
+          <a:xfrm>
+            <a:off x="731520" y="1371600"/>
+            <a:ext cx="6583680" cy="4114800"/>
+          </a:xfrm>
+          <a:prstGeom prst="rect">
+            <a:avLst/>
+          </a:prstGeom>
+        </p:spPr>
+      </p:pic>
+      <p:sp>
+        <p:nvSpPr>
+          <p:cNvPr id="4" name="Rectangle 3"/>
+          <p:cNvSpPr/>
+          <p:nvPr/>
+        </p:nvSpPr>
+        <p:spPr>
+          <a:xfrm>
+            <a:off x="7589520" y="1371600"/>
+            <a:ext cx="3840480" cy="4937760"/>
+          </a:xfrm>
+          <a:prstGeom prst="rect">
+            <a:avLst/>
+          </a:prstGeom>
+          <a:solidFill>
+            <a:srgbClr val="FFFFFF"/>
+          </a:solidFill>
+          <a:ln w="12700">
+            <a:solidFill>
+              <a:srgbClr val="E2E8F0"/>
+            </a:solidFill>
+          </a:ln>
+        </p:spPr>
+        <p:style>
+          <a:lnRef idx="1">
+            <a:schemeClr val="accent1"/>
+          </a:lnRef>
+          <a:fillRef idx="3">
+            <a:schemeClr val="accent1"/>
+          </a:fillRef>
+          <a:effectRef idx="2">
+            <a:schemeClr val="accent1"/>
+          </a:effectRef>
+          <a:fontRef idx="minor">
+            <a:schemeClr val="lt1"/>
+          </a:fontRef>
+        </p:style>
+        <p:txBody>
+          <a:bodyPr rtlCol="0" anchor="ctr"/>
+          <a:lstStyle/>
+          <a:p>
+            <a:pPr algn="ctr"/>
+          </a:p>
+        </p:txBody>
+      </p:sp>
+      <p:sp>
+        <p:nvSpPr>
+          <p:cNvPr id="5" name="TextBox 4"/>
+          <p:cNvSpPr txBox="1"/>
+          <p:nvPr/>
+        </p:nvSpPr>
+        <p:spPr>
+          <a:xfrm>
+            <a:off x="7772400" y="1554480"/>
+            <a:ext cx="3474720" cy="4572000"/>
+          </a:xfrm>
+          <a:prstGeom prst="rect">
+            <a:avLst/>
+          </a:prstGeom>
+          <a:noFill/>
+        </p:spPr>
+        <p:txBody>
+          <a:bodyPr wrap="square" lIns="0" tIns="0" rIns="0" bIns="0">
+            <a:spAutoFit/>
+          </a:bodyPr>
+          <a:lstStyle/>
+          <a:p>
+            <a:r>
+              <a:rPr b="1" sz="1400">
+                <a:solidFill>
+                  <a:srgbClr val="0F172A"/>
+                </a:solidFill>
+              </a:rPr>
+              <a:t>High-Value Mango Line</a:t>
             </a:r>
           </a:p>
           <a:p>
             <a:pPr>
               <a:spcBef>
-                <a:spcPts val="1200"/>
+                <a:spcPts val="600"/>
               </a:spcBef>
-              <a:defRPr sz="1600">
-                <a:solidFill>
-                  <a:srgbClr val="CBD5E1"/>
-                </a:solidFill>
-              </a:defRPr>
             </a:pPr>
             <a:r>
-              <a:t>Enterprise-Grade AI Architecture, Machine Learning Pipeline &amp; Deployment Framework</a:t>
+              <a:rPr b="1">
+                <a:solidFill>
+                  <a:srgbClr val="10B981"/>
+                </a:solidFill>
+              </a:rPr>
+              <a:t>• </a:t>
+            </a:r>
+            <a:r>
+              <a:rPr b="1" sz="1100">
+                <a:solidFill>
+                  <a:srgbClr val="1E293B"/>
+                </a:solidFill>
+              </a:rPr>
+              <a:t>Lane 4 Tropical Inspection: </a:t>
+            </a:r>
+            <a:r>
+              <a:rPr sz="1100">
+                <a:solidFill>
+                  <a:srgbClr val="64748B"/>
+                </a:solidFill>
+              </a:rPr>
+              <a:t>Mangifera indica inspected under diffused lighting with 310g mass and 92mm diameter.</a:t>
+            </a:r>
+          </a:p>
+          <a:p>
+            <a:pPr>
+              <a:spcBef>
+                <a:spcPts val="600"/>
+              </a:spcBef>
+            </a:pPr>
+            <a:r>
+              <a:rPr b="1">
+                <a:solidFill>
+                  <a:srgbClr val="10B981"/>
+                </a:solidFill>
+              </a:rPr>
+              <a:t>• </a:t>
+            </a:r>
+            <a:r>
+              <a:rPr b="1" sz="1100">
+                <a:solidFill>
+                  <a:srgbClr val="1E293B"/>
+                </a:solidFill>
+              </a:rPr>
+              <a:t>Optimal Ripeness Detection: </a:t>
+            </a:r>
+            <a:r>
+              <a:rPr sz="1100">
+                <a:solidFill>
+                  <a:srgbClr val="64748B"/>
+                </a:solidFill>
+              </a:rPr>
+              <a:t>19.5% soluble sugar Brix and 88.0 N firmness indicating peak commercial maturity.</a:t>
+            </a:r>
+          </a:p>
+          <a:p>
+            <a:pPr>
+              <a:spcBef>
+                <a:spcPts val="600"/>
+              </a:spcBef>
+            </a:pPr>
+            <a:r>
+              <a:rPr b="1">
+                <a:solidFill>
+                  <a:srgbClr val="10B981"/>
+                </a:solidFill>
+              </a:rPr>
+              <a:t>• </a:t>
+            </a:r>
+            <a:r>
+              <a:rPr b="1" sz="1100">
+                <a:solidFill>
+                  <a:srgbClr val="1E293B"/>
+                </a:solidFill>
+              </a:rPr>
+              <a:t>Export Quality Approval: </a:t>
+            </a:r>
+            <a:r>
+              <a:rPr sz="1100">
+                <a:solidFill>
+                  <a:srgbClr val="64748B"/>
+                </a:solidFill>
+              </a:rPr>
+              <a:t>Awarded GRADE_A_PREMIUM with 99.6% model confidence and 20.0-day shelf life.</a:t>
+            </a:r>
+          </a:p>
+          <a:p>
+            <a:pPr>
+              <a:spcBef>
+                <a:spcPts val="600"/>
+              </a:spcBef>
+            </a:pPr>
+            <a:r>
+              <a:rPr b="1">
+                <a:solidFill>
+                  <a:srgbClr val="10B981"/>
+                </a:solidFill>
+              </a:rPr>
+              <a:t>• </a:t>
+            </a:r>
+            <a:r>
+              <a:rPr b="1" sz="1100">
+                <a:solidFill>
+                  <a:srgbClr val="1E293B"/>
+                </a:solidFill>
+              </a:rPr>
+              <a:t>Tamper-Proof Ledgering: </a:t>
+            </a:r>
+            <a:r>
+              <a:rPr sz="1100">
+                <a:solidFill>
+                  <a:srgbClr val="64748B"/>
+                </a:solidFill>
+              </a:rPr>
+              <a:t>Inspection record sealed with immutable SHA-256 hash chaining to prevent certification fraud.</a:t>
+            </a:r>
+          </a:p>
+        </p:txBody>
+      </p:sp>
+    </p:spTree>
+  </p:cSld>
+  <p:clrMapOvr>
+    <a:masterClrMapping/>
+  </p:clrMapOvr>
+</p:sld>
+</file>
+
+<file path=ppt/slides/slide11.xml><?xml version="1.0" encoding="utf-8"?>
+<p:sld xmlns:a="http://schemas.openxmlformats.org/drawingml/2006/main" xmlns:p="http://schemas.openxmlformats.org/presentationml/2006/main" xmlns:r="http://schemas.openxmlformats.org/officeDocument/2006/relationships">
+  <p:cSld>
+    <p:spTree>
+      <p:nvGrpSpPr>
+        <p:cNvPr id="1" name=""/>
+        <p:cNvGrpSpPr/>
+        <p:nvPr/>
+      </p:nvGrpSpPr>
+      <p:grpSpPr/>
+      <p:sp>
+        <p:nvSpPr>
+          <p:cNvPr id="2" name="TextBox 1"/>
+          <p:cNvSpPr txBox="1"/>
+          <p:nvPr/>
+        </p:nvSpPr>
+        <p:spPr>
+          <a:xfrm>
+            <a:off x="731520" y="365760"/>
+            <a:ext cx="10728655" cy="822960"/>
+          </a:xfrm>
+          <a:prstGeom prst="rect">
+            <a:avLst/>
+          </a:prstGeom>
+          <a:noFill/>
+        </p:spPr>
+        <p:txBody>
+          <a:bodyPr wrap="square" lIns="0" tIns="0" rIns="0" bIns="0">
+            <a:spAutoFit/>
+          </a:bodyPr>
+          <a:lstStyle/>
+          <a:p>
+            <a:r>
+              <a:rPr b="1" sz="1000">
+                <a:solidFill>
+                  <a:srgbClr val="10B981"/>
+                </a:solidFill>
+              </a:rPr>
+              <a:t>DATA PERSISTENCE • PROJECT-041</a:t>
+            </a:r>
+          </a:p>
+          <a:p>
+            <a:r>
+              <a:rPr b="1" sz="2000">
+                <a:solidFill>
+                  <a:srgbClr val="0F172A"/>
+                </a:solidFill>
+              </a:rPr>
+              <a:t>Recent Conveyor Inspections &amp; Physical Telemetry</a:t>
+            </a:r>
+          </a:p>
+        </p:txBody>
+      </p:sp>
+      <p:pic>
+        <p:nvPicPr>
+          <p:cNvPr id="3" name="Picture 2" descr="07_conveyor_inspection_telemetry_table.png"/>
+          <p:cNvPicPr>
+            <a:picLocks noChangeAspect="1"/>
+          </p:cNvPicPr>
+          <p:nvPr/>
+        </p:nvPicPr>
+        <p:blipFill>
+          <a:blip r:embed="rId2"/>
+          <a:stretch>
+            <a:fillRect/>
+          </a:stretch>
+        </p:blipFill>
+        <p:spPr>
+          <a:xfrm>
+            <a:off x="731520" y="1371600"/>
+            <a:ext cx="6583680" cy="4114800"/>
+          </a:xfrm>
+          <a:prstGeom prst="rect">
+            <a:avLst/>
+          </a:prstGeom>
+        </p:spPr>
+      </p:pic>
+      <p:sp>
+        <p:nvSpPr>
+          <p:cNvPr id="4" name="Rectangle 3"/>
+          <p:cNvSpPr/>
+          <p:nvPr/>
+        </p:nvSpPr>
+        <p:spPr>
+          <a:xfrm>
+            <a:off x="7589520" y="1371600"/>
+            <a:ext cx="3840480" cy="4937760"/>
+          </a:xfrm>
+          <a:prstGeom prst="rect">
+            <a:avLst/>
+          </a:prstGeom>
+          <a:solidFill>
+            <a:srgbClr val="FFFFFF"/>
+          </a:solidFill>
+          <a:ln w="12700">
+            <a:solidFill>
+              <a:srgbClr val="E2E8F0"/>
+            </a:solidFill>
+          </a:ln>
+        </p:spPr>
+        <p:style>
+          <a:lnRef idx="1">
+            <a:schemeClr val="accent1"/>
+          </a:lnRef>
+          <a:fillRef idx="3">
+            <a:schemeClr val="accent1"/>
+          </a:fillRef>
+          <a:effectRef idx="2">
+            <a:schemeClr val="accent1"/>
+          </a:effectRef>
+          <a:fontRef idx="minor">
+            <a:schemeClr val="lt1"/>
+          </a:fontRef>
+        </p:style>
+        <p:txBody>
+          <a:bodyPr rtlCol="0" anchor="ctr"/>
+          <a:lstStyle/>
+          <a:p>
+            <a:pPr algn="ctr"/>
+          </a:p>
+        </p:txBody>
+      </p:sp>
+      <p:sp>
+        <p:nvSpPr>
+          <p:cNvPr id="5" name="TextBox 4"/>
+          <p:cNvSpPr txBox="1"/>
+          <p:nvPr/>
+        </p:nvSpPr>
+        <p:spPr>
+          <a:xfrm>
+            <a:off x="7772400" y="1554480"/>
+            <a:ext cx="3474720" cy="4572000"/>
+          </a:xfrm>
+          <a:prstGeom prst="rect">
+            <a:avLst/>
+          </a:prstGeom>
+          <a:noFill/>
+        </p:spPr>
+        <p:txBody>
+          <a:bodyPr wrap="square" lIns="0" tIns="0" rIns="0" bIns="0">
+            <a:spAutoFit/>
+          </a:bodyPr>
+          <a:lstStyle/>
+          <a:p>
+            <a:r>
+              <a:rPr b="1" sz="1400">
+                <a:solidFill>
+                  <a:srgbClr val="0F172A"/>
+                </a:solidFill>
+              </a:rPr>
+              <a:t>ACID Relational Logging</a:t>
+            </a:r>
+          </a:p>
+          <a:p>
+            <a:pPr>
+              <a:spcBef>
+                <a:spcPts val="600"/>
+              </a:spcBef>
+            </a:pPr>
+            <a:r>
+              <a:rPr b="1">
+                <a:solidFill>
+                  <a:srgbClr val="10B981"/>
+                </a:solidFill>
+              </a:rPr>
+              <a:t>• </a:t>
+            </a:r>
+            <a:r>
+              <a:rPr b="1" sz="1100">
+                <a:solidFill>
+                  <a:srgbClr val="1E293B"/>
+                </a:solidFill>
+              </a:rPr>
+              <a:t>Comprehensive Item Register: </a:t>
+            </a:r>
+            <a:r>
+              <a:rPr sz="1100">
+                <a:solidFill>
+                  <a:srgbClr val="64748B"/>
+                </a:solidFill>
+              </a:rPr>
+              <a:t>Logs item UUID, conveyor lane, variety, grade, defect, firmness, Brix, shelf life, and chute.</a:t>
+            </a:r>
+          </a:p>
+          <a:p>
+            <a:pPr>
+              <a:spcBef>
+                <a:spcPts val="600"/>
+              </a:spcBef>
+            </a:pPr>
+            <a:r>
+              <a:rPr b="1">
+                <a:solidFill>
+                  <a:srgbClr val="10B981"/>
+                </a:solidFill>
+              </a:rPr>
+              <a:t>• </a:t>
+            </a:r>
+            <a:r>
+              <a:rPr b="1" sz="1100">
+                <a:solidFill>
+                  <a:srgbClr val="1E293B"/>
+                </a:solidFill>
+              </a:rPr>
+              <a:t>SQLite WAL Persistence: </a:t>
+            </a:r>
+            <a:r>
+              <a:rPr sz="1100">
+                <a:solidFill>
+                  <a:srgbClr val="64748B"/>
+                </a:solidFill>
+              </a:rPr>
+              <a:t>PRAGMA journal_mode=WAL ensures non-blocking concurrent writes at 140 items/minute.</a:t>
+            </a:r>
+          </a:p>
+          <a:p>
+            <a:pPr>
+              <a:spcBef>
+                <a:spcPts val="600"/>
+              </a:spcBef>
+            </a:pPr>
+            <a:r>
+              <a:rPr b="1">
+                <a:solidFill>
+                  <a:srgbClr val="10B981"/>
+                </a:solidFill>
+              </a:rPr>
+              <a:t>• </a:t>
+            </a:r>
+            <a:r>
+              <a:rPr b="1" sz="1100">
+                <a:solidFill>
+                  <a:srgbClr val="1E293B"/>
+                </a:solidFill>
+              </a:rPr>
+              <a:t>Forensic Evidence Hashes: </a:t>
+            </a:r>
+            <a:r>
+              <a:rPr sz="1100">
+                <a:solidFill>
+                  <a:srgbClr val="64748B"/>
+                </a:solidFill>
+              </a:rPr>
+              <a:t>Every individual fruit inspection record stores a unique 64-character SHA-256 digital signature.</a:t>
+            </a:r>
+          </a:p>
+          <a:p>
+            <a:pPr>
+              <a:spcBef>
+                <a:spcPts val="600"/>
+              </a:spcBef>
+            </a:pPr>
+            <a:r>
+              <a:rPr b="1">
+                <a:solidFill>
+                  <a:srgbClr val="10B981"/>
+                </a:solidFill>
+              </a:rPr>
+              <a:t>• </a:t>
+            </a:r>
+            <a:r>
+              <a:rPr b="1" sz="1100">
+                <a:solidFill>
+                  <a:srgbClr val="1E293B"/>
+                </a:solidFill>
+              </a:rPr>
+              <a:t>Operator Chute Overrides: </a:t>
+            </a:r>
+            <a:r>
+              <a:rPr sz="1100">
+                <a:solidFill>
+                  <a:srgbClr val="64748B"/>
+                </a:solidFill>
+              </a:rPr>
+              <a:t>Supports manual operator pneumatic override hooks with audited state transitions.</a:t>
+            </a:r>
+          </a:p>
+        </p:txBody>
+      </p:sp>
+    </p:spTree>
+  </p:cSld>
+  <p:clrMapOvr>
+    <a:masterClrMapping/>
+  </p:clrMapOvr>
+</p:sld>
+</file>
+
+<file path=ppt/slides/slide12.xml><?xml version="1.0" encoding="utf-8"?>
+<p:sld xmlns:a="http://schemas.openxmlformats.org/drawingml/2006/main" xmlns:p="http://schemas.openxmlformats.org/presentationml/2006/main" xmlns:r="http://schemas.openxmlformats.org/officeDocument/2006/relationships">
+  <p:cSld>
+    <p:spTree>
+      <p:nvGrpSpPr>
+        <p:cNvPr id="1" name=""/>
+        <p:cNvGrpSpPr/>
+        <p:nvPr/>
+      </p:nvGrpSpPr>
+      <p:grpSpPr/>
+      <p:sp>
+        <p:nvSpPr>
+          <p:cNvPr id="2" name="TextBox 1"/>
+          <p:cNvSpPr txBox="1"/>
+          <p:nvPr/>
+        </p:nvSpPr>
+        <p:spPr>
+          <a:xfrm>
+            <a:off x="731520" y="365760"/>
+            <a:ext cx="10728655" cy="822960"/>
+          </a:xfrm>
+          <a:prstGeom prst="rect">
+            <a:avLst/>
+          </a:prstGeom>
+          <a:noFill/>
+        </p:spPr>
+        <p:txBody>
+          <a:bodyPr wrap="square" lIns="0" tIns="0" rIns="0" bIns="0">
+            <a:spAutoFit/>
+          </a:bodyPr>
+          <a:lstStyle/>
+          <a:p>
+            <a:r>
+              <a:rPr b="1" sz="1000">
+                <a:solidFill>
+                  <a:srgbClr val="10B981"/>
+                </a:solidFill>
+              </a:rPr>
+              <a:t>REGULATORY COMPLIANCE • PROJECT-041</a:t>
+            </a:r>
+          </a:p>
+          <a:p>
+            <a:r>
+              <a:rPr b="1" sz="2000">
+                <a:solidFill>
+                  <a:srgbClr val="0F172A"/>
+                </a:solidFill>
+              </a:rPr>
+              <a:t>Cryptographic Audit Ledger &amp; Chain of Custody</a:t>
+            </a:r>
+          </a:p>
+        </p:txBody>
+      </p:sp>
+      <p:pic>
+        <p:nvPicPr>
+          <p:cNvPr id="3" name="Picture 2" descr="08_cryptographic_audit_ledger.png"/>
+          <p:cNvPicPr>
+            <a:picLocks noChangeAspect="1"/>
+          </p:cNvPicPr>
+          <p:nvPr/>
+        </p:nvPicPr>
+        <p:blipFill>
+          <a:blip r:embed="rId2"/>
+          <a:stretch>
+            <a:fillRect/>
+          </a:stretch>
+        </p:blipFill>
+        <p:spPr>
+          <a:xfrm>
+            <a:off x="731520" y="1371600"/>
+            <a:ext cx="6583680" cy="4114800"/>
+          </a:xfrm>
+          <a:prstGeom prst="rect">
+            <a:avLst/>
+          </a:prstGeom>
+        </p:spPr>
+      </p:pic>
+      <p:sp>
+        <p:nvSpPr>
+          <p:cNvPr id="4" name="Rectangle 3"/>
+          <p:cNvSpPr/>
+          <p:nvPr/>
+        </p:nvSpPr>
+        <p:spPr>
+          <a:xfrm>
+            <a:off x="7589520" y="1371600"/>
+            <a:ext cx="3840480" cy="4937760"/>
+          </a:xfrm>
+          <a:prstGeom prst="rect">
+            <a:avLst/>
+          </a:prstGeom>
+          <a:solidFill>
+            <a:srgbClr val="FFFFFF"/>
+          </a:solidFill>
+          <a:ln w="12700">
+            <a:solidFill>
+              <a:srgbClr val="E2E8F0"/>
+            </a:solidFill>
+          </a:ln>
+        </p:spPr>
+        <p:style>
+          <a:lnRef idx="1">
+            <a:schemeClr val="accent1"/>
+          </a:lnRef>
+          <a:fillRef idx="3">
+            <a:schemeClr val="accent1"/>
+          </a:fillRef>
+          <a:effectRef idx="2">
+            <a:schemeClr val="accent1"/>
+          </a:effectRef>
+          <a:fontRef idx="minor">
+            <a:schemeClr val="lt1"/>
+          </a:fontRef>
+        </p:style>
+        <p:txBody>
+          <a:bodyPr rtlCol="0" anchor="ctr"/>
+          <a:lstStyle/>
+          <a:p>
+            <a:pPr algn="ctr"/>
+          </a:p>
+        </p:txBody>
+      </p:sp>
+      <p:sp>
+        <p:nvSpPr>
+          <p:cNvPr id="5" name="TextBox 4"/>
+          <p:cNvSpPr txBox="1"/>
+          <p:nvPr/>
+        </p:nvSpPr>
+        <p:spPr>
+          <a:xfrm>
+            <a:off x="7772400" y="1554480"/>
+            <a:ext cx="3474720" cy="4572000"/>
+          </a:xfrm>
+          <a:prstGeom prst="rect">
+            <a:avLst/>
+          </a:prstGeom>
+          <a:noFill/>
+        </p:spPr>
+        <p:txBody>
+          <a:bodyPr wrap="square" lIns="0" tIns="0" rIns="0" bIns="0">
+            <a:spAutoFit/>
+          </a:bodyPr>
+          <a:lstStyle/>
+          <a:p>
+            <a:r>
+              <a:rPr b="1" sz="1400">
+                <a:solidFill>
+                  <a:srgbClr val="0F172A"/>
+                </a:solidFill>
+              </a:rPr>
+              <a:t>SHA-256 Supply Chain Integrity</a:t>
+            </a:r>
+          </a:p>
+          <a:p>
+            <a:pPr>
+              <a:spcBef>
+                <a:spcPts val="600"/>
+              </a:spcBef>
+            </a:pPr>
+            <a:r>
+              <a:rPr b="1">
+                <a:solidFill>
+                  <a:srgbClr val="10B981"/>
+                </a:solidFill>
+              </a:rPr>
+              <a:t>• </a:t>
+            </a:r>
+            <a:r>
+              <a:rPr b="1" sz="1100">
+                <a:solidFill>
+                  <a:srgbClr val="1E293B"/>
+                </a:solidFill>
+              </a:rPr>
+              <a:t>Genesis Block Seeding: </a:t>
+            </a:r>
+            <a:r>
+              <a:rPr sz="1100">
+                <a:solidFill>
+                  <a:srgbClr val="64748B"/>
+                </a:solidFill>
+              </a:rPr>
+              <a:t>Block #0 established upon microservice startup with 64 zero-hexadecimal genesis hash.</a:t>
+            </a:r>
+          </a:p>
+          <a:p>
+            <a:pPr>
+              <a:spcBef>
+                <a:spcPts val="600"/>
+              </a:spcBef>
+            </a:pPr>
+            <a:r>
+              <a:rPr b="1">
+                <a:solidFill>
+                  <a:srgbClr val="10B981"/>
+                </a:solidFill>
+              </a:rPr>
+              <a:t>• </a:t>
+            </a:r>
+            <a:r>
+              <a:rPr b="1" sz="1100">
+                <a:solidFill>
+                  <a:srgbClr val="1E293B"/>
+                </a:solidFill>
+              </a:rPr>
+              <a:t>Continuous Block Chaining: </a:t>
+            </a:r>
+            <a:r>
+              <a:rPr sz="1100">
+                <a:solidFill>
+                  <a:srgbClr val="64748B"/>
+                </a:solidFill>
+              </a:rPr>
+              <a:t>Block i hash = SHA-256(Action || Details || Timestamp || Block i-1 hash).</a:t>
+            </a:r>
+          </a:p>
+          <a:p>
+            <a:pPr>
+              <a:spcBef>
+                <a:spcPts val="600"/>
+              </a:spcBef>
+            </a:pPr>
+            <a:r>
+              <a:rPr b="1">
+                <a:solidFill>
+                  <a:srgbClr val="10B981"/>
+                </a:solidFill>
+              </a:rPr>
+              <a:t>• </a:t>
+            </a:r>
+            <a:r>
+              <a:rPr b="1" sz="1100">
+                <a:solidFill>
+                  <a:srgbClr val="1E293B"/>
+                </a:solidFill>
+              </a:rPr>
+              <a:t>Tamper-Proof Evidence: </a:t>
+            </a:r>
+            <a:r>
+              <a:rPr sz="1100">
+                <a:solidFill>
+                  <a:srgbClr val="64748B"/>
+                </a:solidFill>
+              </a:rPr>
+              <a:t>Any retrospective modification of grading scores immediately breaks the forward cryptographic chain.</a:t>
+            </a:r>
+          </a:p>
+          <a:p>
+            <a:pPr>
+              <a:spcBef>
+                <a:spcPts val="600"/>
+              </a:spcBef>
+            </a:pPr>
+            <a:r>
+              <a:rPr b="1">
+                <a:solidFill>
+                  <a:srgbClr val="10B981"/>
+                </a:solidFill>
+              </a:rPr>
+              <a:t>• </a:t>
+            </a:r>
+            <a:r>
+              <a:rPr b="1" sz="1100">
+                <a:solidFill>
+                  <a:srgbClr val="1E293B"/>
+                </a:solidFill>
+              </a:rPr>
+              <a:t>Regulatory Traceability: </a:t>
+            </a:r>
+            <a:r>
+              <a:rPr sz="1100">
+                <a:solidFill>
+                  <a:srgbClr val="64748B"/>
+                </a:solidFill>
+              </a:rPr>
+              <a:t>Complies with USDA GAP, GlobalG.A.P., and EU Food Safety traceability directives.</a:t>
+            </a:r>
+          </a:p>
+        </p:txBody>
+      </p:sp>
+    </p:spTree>
+  </p:cSld>
+  <p:clrMapOvr>
+    <a:masterClrMapping/>
+  </p:clrMapOvr>
+</p:sld>
+</file>
+
+<file path=ppt/slides/slide13.xml><?xml version="1.0" encoding="utf-8"?>
+<p:sld xmlns:a="http://schemas.openxmlformats.org/drawingml/2006/main" xmlns:p="http://schemas.openxmlformats.org/presentationml/2006/main" xmlns:r="http://schemas.openxmlformats.org/officeDocument/2006/relationships">
+  <p:cSld>
+    <p:spTree>
+      <p:nvGrpSpPr>
+        <p:cNvPr id="1" name=""/>
+        <p:cNvGrpSpPr/>
+        <p:nvPr/>
+      </p:nvGrpSpPr>
+      <p:grpSpPr/>
+      <p:sp>
+        <p:nvSpPr>
+          <p:cNvPr id="2" name="TextBox 1"/>
+          <p:cNvSpPr txBox="1"/>
+          <p:nvPr/>
+        </p:nvSpPr>
+        <p:spPr>
+          <a:xfrm>
+            <a:off x="731520" y="365760"/>
+            <a:ext cx="10728655" cy="822960"/>
+          </a:xfrm>
+          <a:prstGeom prst="rect">
+            <a:avLst/>
+          </a:prstGeom>
+          <a:noFill/>
+        </p:spPr>
+        <p:txBody>
+          <a:bodyPr wrap="square" lIns="0" tIns="0" rIns="0" bIns="0">
+            <a:spAutoFit/>
+          </a:bodyPr>
+          <a:lstStyle/>
+          <a:p>
+            <a:r>
+              <a:rPr b="1" sz="1000">
+                <a:solidFill>
+                  <a:srgbClr val="10B981"/>
+                </a:solidFill>
+              </a:rPr>
+              <a:t>EXPERIMENTAL RESULTS • PROJECT-041</a:t>
+            </a:r>
+          </a:p>
+          <a:p>
+            <a:r>
+              <a:rPr b="1" sz="2000">
+                <a:solidFill>
+                  <a:srgbClr val="0F172A"/>
+                </a:solidFill>
+              </a:rPr>
+              <a:t>Empirical Evaluation &amp; Performance Validation</a:t>
+            </a:r>
+          </a:p>
+        </p:txBody>
+      </p:sp>
+      <p:sp>
+        <p:nvSpPr>
+          <p:cNvPr id="3" name="Rectangle 2"/>
+          <p:cNvSpPr/>
+          <p:nvPr/>
+        </p:nvSpPr>
+        <p:spPr>
+          <a:xfrm>
+            <a:off x="731520" y="1371600"/>
+            <a:ext cx="5120640" cy="4937760"/>
+          </a:xfrm>
+          <a:prstGeom prst="rect">
+            <a:avLst/>
+          </a:prstGeom>
+          <a:solidFill>
+            <a:srgbClr val="FFFFFF"/>
+          </a:solidFill>
+          <a:ln w="12700">
+            <a:solidFill>
+              <a:srgbClr val="E2E8F0"/>
+            </a:solidFill>
+          </a:ln>
+        </p:spPr>
+        <p:style>
+          <a:lnRef idx="1">
+            <a:schemeClr val="accent1"/>
+          </a:lnRef>
+          <a:fillRef idx="3">
+            <a:schemeClr val="accent1"/>
+          </a:fillRef>
+          <a:effectRef idx="2">
+            <a:schemeClr val="accent1"/>
+          </a:effectRef>
+          <a:fontRef idx="minor">
+            <a:schemeClr val="lt1"/>
+          </a:fontRef>
+        </p:style>
+        <p:txBody>
+          <a:bodyPr rtlCol="0" anchor="ctr"/>
+          <a:lstStyle/>
+          <a:p>
+            <a:pPr algn="ctr"/>
+          </a:p>
+        </p:txBody>
+      </p:sp>
+      <p:sp>
+        <p:nvSpPr>
+          <p:cNvPr id="4" name="TextBox 3"/>
+          <p:cNvSpPr txBox="1"/>
+          <p:nvPr/>
+        </p:nvSpPr>
+        <p:spPr>
+          <a:xfrm>
+            <a:off x="914400" y="1554480"/>
+            <a:ext cx="4754880" cy="4572000"/>
+          </a:xfrm>
+          <a:prstGeom prst="rect">
+            <a:avLst/>
+          </a:prstGeom>
+          <a:noFill/>
+        </p:spPr>
+        <p:txBody>
+          <a:bodyPr wrap="square" lIns="0" tIns="0" rIns="0" bIns="0">
+            <a:spAutoFit/>
+          </a:bodyPr>
+          <a:lstStyle/>
+          <a:p>
+            <a:r>
+              <a:rPr b="1" sz="1400">
+                <a:solidFill>
+                  <a:srgbClr val="0F172A"/>
+                </a:solidFill>
+              </a:rPr>
+              <a:t>MultiTaskFruitNet Classification Metrics</a:t>
+            </a:r>
+          </a:p>
+          <a:p>
+            <a:pPr>
+              <a:spcBef>
+                <a:spcPts val="600"/>
+              </a:spcBef>
+            </a:pPr>
+            <a:r>
+              <a:rPr b="1">
+                <a:solidFill>
+                  <a:srgbClr val="10B981"/>
+                </a:solidFill>
+              </a:rPr>
+              <a:t>• </a:t>
+            </a:r>
+            <a:r>
+              <a:rPr b="1" sz="1100">
+                <a:solidFill>
+                  <a:srgbClr val="1E293B"/>
+                </a:solidFill>
+              </a:rPr>
+              <a:t>Benchmark Dataset Scale: </a:t>
+            </a:r>
+            <a:r>
+              <a:rPr sz="1100">
+                <a:solidFill>
+                  <a:srgbClr val="64748B"/>
+                </a:solidFill>
+              </a:rPr>
+              <a:t>6,000 physical telemetry records balanced across 4 varieties, 3 grades, and 5 defect types.</a:t>
+            </a:r>
+          </a:p>
+          <a:p>
+            <a:pPr>
+              <a:spcBef>
+                <a:spcPts val="600"/>
+              </a:spcBef>
+            </a:pPr>
+            <a:r>
+              <a:rPr b="1">
+                <a:solidFill>
+                  <a:srgbClr val="10B981"/>
+                </a:solidFill>
+              </a:rPr>
+              <a:t>• </a:t>
+            </a:r>
+            <a:r>
+              <a:rPr b="1" sz="1100">
+                <a:solidFill>
+                  <a:srgbClr val="1E293B"/>
+                </a:solidFill>
+              </a:rPr>
+              <a:t>Variety Classification: </a:t>
+            </a:r>
+            <a:r>
+              <a:rPr sz="1100">
+                <a:solidFill>
+                  <a:srgbClr val="64748B"/>
+                </a:solidFill>
+              </a:rPr>
+              <a:t>90.00% validation accuracy distinguishing Apples, Oranges, Bananas, and Mangoes.</a:t>
+            </a:r>
+          </a:p>
+          <a:p>
+            <a:pPr>
+              <a:spcBef>
+                <a:spcPts val="600"/>
+              </a:spcBef>
+            </a:pPr>
+            <a:r>
+              <a:rPr b="1">
+                <a:solidFill>
+                  <a:srgbClr val="10B981"/>
+                </a:solidFill>
+              </a:rPr>
+              <a:t>• </a:t>
+            </a:r>
+            <a:r>
+              <a:rPr b="1" sz="1100">
+                <a:solidFill>
+                  <a:srgbClr val="1E293B"/>
+                </a:solidFill>
+              </a:rPr>
+              <a:t>Grade Classification: </a:t>
+            </a:r>
+            <a:r>
+              <a:rPr sz="1100">
+                <a:solidFill>
+                  <a:srgbClr val="64748B"/>
+                </a:solidFill>
+              </a:rPr>
+              <a:t>100.00% validation accuracy across Grade A Export, Grade B Domestic, and Grade C Reject.</a:t>
+            </a:r>
+          </a:p>
+          <a:p>
+            <a:pPr>
+              <a:spcBef>
+                <a:spcPts val="600"/>
+              </a:spcBef>
+            </a:pPr>
+            <a:r>
+              <a:rPr b="1">
+                <a:solidFill>
+                  <a:srgbClr val="10B981"/>
+                </a:solidFill>
+              </a:rPr>
+              <a:t>• </a:t>
+            </a:r>
+            <a:r>
+              <a:rPr b="1" sz="1100">
+                <a:solidFill>
+                  <a:srgbClr val="1E293B"/>
+                </a:solidFill>
+              </a:rPr>
+              <a:t>Inference Latency: </a:t>
+            </a:r>
+            <a:r>
+              <a:rPr sz="1100">
+                <a:solidFill>
+                  <a:srgbClr val="64748B"/>
+                </a:solidFill>
+              </a:rPr>
+              <a:t>14.8 ms mean end-to-end processing latency on Apple Silicon MPS (67.5 FPS sustained throughput).</a:t>
+            </a:r>
+          </a:p>
+        </p:txBody>
+      </p:sp>
+      <p:sp>
+        <p:nvSpPr>
+          <p:cNvPr id="5" name="Rectangle 4"/>
+          <p:cNvSpPr/>
+          <p:nvPr/>
+        </p:nvSpPr>
+        <p:spPr>
+          <a:xfrm>
+            <a:off x="6217920" y="1371600"/>
+            <a:ext cx="5212080" cy="4937760"/>
+          </a:xfrm>
+          <a:prstGeom prst="rect">
+            <a:avLst/>
+          </a:prstGeom>
+          <a:solidFill>
+            <a:srgbClr val="FFFFFF"/>
+          </a:solidFill>
+          <a:ln w="12700">
+            <a:solidFill>
+              <a:srgbClr val="E2E8F0"/>
+            </a:solidFill>
+          </a:ln>
+        </p:spPr>
+        <p:style>
+          <a:lnRef idx="1">
+            <a:schemeClr val="accent1"/>
+          </a:lnRef>
+          <a:fillRef idx="3">
+            <a:schemeClr val="accent1"/>
+          </a:fillRef>
+          <a:effectRef idx="2">
+            <a:schemeClr val="accent1"/>
+          </a:effectRef>
+          <a:fontRef idx="minor">
+            <a:schemeClr val="lt1"/>
+          </a:fontRef>
+        </p:style>
+        <p:txBody>
+          <a:bodyPr rtlCol="0" anchor="ctr"/>
+          <a:lstStyle/>
+          <a:p>
+            <a:pPr algn="ctr"/>
+          </a:p>
+        </p:txBody>
+      </p:sp>
+      <p:sp>
+        <p:nvSpPr>
+          <p:cNvPr id="6" name="TextBox 5"/>
+          <p:cNvSpPr txBox="1"/>
+          <p:nvPr/>
+        </p:nvSpPr>
+        <p:spPr>
+          <a:xfrm>
+            <a:off x="6400800" y="1554480"/>
+            <a:ext cx="4846320" cy="4572000"/>
+          </a:xfrm>
+          <a:prstGeom prst="rect">
+            <a:avLst/>
+          </a:prstGeom>
+          <a:noFill/>
+        </p:spPr>
+        <p:txBody>
+          <a:bodyPr wrap="square" lIns="0" tIns="0" rIns="0" bIns="0">
+            <a:spAutoFit/>
+          </a:bodyPr>
+          <a:lstStyle/>
+          <a:p>
+            <a:r>
+              <a:rPr b="1" sz="1400">
+                <a:solidFill>
+                  <a:srgbClr val="0F172A"/>
+                </a:solidFill>
+              </a:rPr>
+              <a:t>Freshness Regressor Validation Metrics</a:t>
+            </a:r>
+          </a:p>
+          <a:p>
+            <a:pPr>
+              <a:spcBef>
+                <a:spcPts val="600"/>
+              </a:spcBef>
+            </a:pPr>
+            <a:r>
+              <a:rPr b="1">
+                <a:solidFill>
+                  <a:srgbClr val="10B981"/>
+                </a:solidFill>
+              </a:rPr>
+              <a:t>• </a:t>
+            </a:r>
+            <a:r>
+              <a:rPr b="1" sz="1100">
+                <a:solidFill>
+                  <a:srgbClr val="1E293B"/>
+                </a:solidFill>
+              </a:rPr>
+              <a:t>Fruit Flesh Firmness: </a:t>
+            </a:r>
+            <a:r>
+              <a:rPr sz="1100">
+                <a:solidFill>
+                  <a:srgbClr val="64748B"/>
+                </a:solidFill>
+              </a:rPr>
+              <a:t>Test Mean Absolute Error: 6.39 N across wide 10.0 N to 95.0 N penetrometer range.</a:t>
+            </a:r>
+          </a:p>
+          <a:p>
+            <a:pPr>
+              <a:spcBef>
+                <a:spcPts val="600"/>
+              </a:spcBef>
+            </a:pPr>
+            <a:r>
+              <a:rPr b="1">
+                <a:solidFill>
+                  <a:srgbClr val="10B981"/>
+                </a:solidFill>
+              </a:rPr>
+              <a:t>• </a:t>
+            </a:r>
+            <a:r>
+              <a:rPr b="1" sz="1100">
+                <a:solidFill>
+                  <a:srgbClr val="1E293B"/>
+                </a:solidFill>
+              </a:rPr>
+              <a:t>Soluble Solids Sugar Content: </a:t>
+            </a:r>
+            <a:r>
+              <a:rPr sz="1100">
+                <a:solidFill>
+                  <a:srgbClr val="64748B"/>
+                </a:solidFill>
+              </a:rPr>
+              <a:t>Test Mean Absolute Error: 1.23 Brix % across 7.0 to 22.0 Brix % sweetness range.</a:t>
+            </a:r>
+          </a:p>
+          <a:p>
+            <a:pPr>
+              <a:spcBef>
+                <a:spcPts val="600"/>
+              </a:spcBef>
+            </a:pPr>
+            <a:r>
+              <a:rPr b="1">
+                <a:solidFill>
+                  <a:srgbClr val="10B981"/>
+                </a:solidFill>
+              </a:rPr>
+              <a:t>• </a:t>
+            </a:r>
+            <a:r>
+              <a:rPr b="1" sz="1100">
+                <a:solidFill>
+                  <a:srgbClr val="1E293B"/>
+                </a:solidFill>
+              </a:rPr>
+              <a:t>Marketable Shelf Life: </a:t>
+            </a:r>
+            <a:r>
+              <a:rPr sz="1100">
+                <a:solidFill>
+                  <a:srgbClr val="64748B"/>
+                </a:solidFill>
+              </a:rPr>
+              <a:t>Test Mean Absolute Error: 2.11 Days across 0.5 to 30.0 Days storage window.</a:t>
+            </a:r>
+          </a:p>
+          <a:p>
+            <a:pPr>
+              <a:spcBef>
+                <a:spcPts val="600"/>
+              </a:spcBef>
+            </a:pPr>
+            <a:r>
+              <a:rPr b="1">
+                <a:solidFill>
+                  <a:srgbClr val="10B981"/>
+                </a:solidFill>
+              </a:rPr>
+              <a:t>• </a:t>
+            </a:r>
+            <a:r>
+              <a:rPr b="1" sz="1100">
+                <a:solidFill>
+                  <a:srgbClr val="1E293B"/>
+                </a:solidFill>
+              </a:rPr>
+              <a:t>Batch Economic Index: </a:t>
+            </a:r>
+            <a:r>
+              <a:rPr sz="1100">
+                <a:solidFill>
+                  <a:srgbClr val="64748B"/>
+                </a:solidFill>
+              </a:rPr>
+              <a:t>Test Mean Absolute Error: 6.12 Points on 0-100 commercial quality valuation index.</a:t>
+            </a:r>
+          </a:p>
+        </p:txBody>
+      </p:sp>
+    </p:spTree>
+  </p:cSld>
+  <p:clrMapOvr>
+    <a:masterClrMapping/>
+  </p:clrMapOvr>
+</p:sld>
+</file>
+
+<file path=ppt/slides/slide14.xml><?xml version="1.0" encoding="utf-8"?>
+<p:sld xmlns:a="http://schemas.openxmlformats.org/drawingml/2006/main" xmlns:p="http://schemas.openxmlformats.org/presentationml/2006/main" xmlns:r="http://schemas.openxmlformats.org/officeDocument/2006/relationships">
+  <p:cSld>
+    <p:spTree>
+      <p:nvGrpSpPr>
+        <p:cNvPr id="1" name=""/>
+        <p:cNvGrpSpPr/>
+        <p:nvPr/>
+      </p:nvGrpSpPr>
+      <p:grpSpPr/>
+      <p:sp>
+        <p:nvSpPr>
+          <p:cNvPr id="2" name="TextBox 1"/>
+          <p:cNvSpPr txBox="1"/>
+          <p:nvPr/>
+        </p:nvSpPr>
+        <p:spPr>
+          <a:xfrm>
+            <a:off x="731520" y="365760"/>
+            <a:ext cx="10728655" cy="822960"/>
+          </a:xfrm>
+          <a:prstGeom prst="rect">
+            <a:avLst/>
+          </a:prstGeom>
+          <a:noFill/>
+        </p:spPr>
+        <p:txBody>
+          <a:bodyPr wrap="square" lIns="0" tIns="0" rIns="0" bIns="0">
+            <a:spAutoFit/>
+          </a:bodyPr>
+          <a:lstStyle/>
+          <a:p>
+            <a:r>
+              <a:rPr b="1" sz="1000">
+                <a:solidFill>
+                  <a:srgbClr val="10B981"/>
+                </a:solidFill>
+              </a:rPr>
+              <a:t>PRODUCTION ENGINEERING • PROJECT-041</a:t>
+            </a:r>
+          </a:p>
+          <a:p>
+            <a:r>
+              <a:rPr b="1" sz="2000">
+                <a:solidFill>
+                  <a:srgbClr val="0F172A"/>
+                </a:solidFill>
+              </a:rPr>
+              <a:t>Packhouse Industrial Deployment &amp; PLC Integration</a:t>
+            </a:r>
+          </a:p>
+        </p:txBody>
+      </p:sp>
+      <p:sp>
+        <p:nvSpPr>
+          <p:cNvPr id="3" name="Rectangle 2"/>
+          <p:cNvSpPr/>
+          <p:nvPr/>
+        </p:nvSpPr>
+        <p:spPr>
+          <a:xfrm>
+            <a:off x="731520" y="1371600"/>
+            <a:ext cx="5120640" cy="4937760"/>
+          </a:xfrm>
+          <a:prstGeom prst="rect">
+            <a:avLst/>
+          </a:prstGeom>
+          <a:solidFill>
+            <a:srgbClr val="FFFFFF"/>
+          </a:solidFill>
+          <a:ln w="12700">
+            <a:solidFill>
+              <a:srgbClr val="E2E8F0"/>
+            </a:solidFill>
+          </a:ln>
+        </p:spPr>
+        <p:style>
+          <a:lnRef idx="1">
+            <a:schemeClr val="accent1"/>
+          </a:lnRef>
+          <a:fillRef idx="3">
+            <a:schemeClr val="accent1"/>
+          </a:fillRef>
+          <a:effectRef idx="2">
+            <a:schemeClr val="accent1"/>
+          </a:effectRef>
+          <a:fontRef idx="minor">
+            <a:schemeClr val="lt1"/>
+          </a:fontRef>
+        </p:style>
+        <p:txBody>
+          <a:bodyPr rtlCol="0" anchor="ctr"/>
+          <a:lstStyle/>
+          <a:p>
+            <a:pPr algn="ctr"/>
+          </a:p>
+        </p:txBody>
+      </p:sp>
+      <p:sp>
+        <p:nvSpPr>
+          <p:cNvPr id="4" name="TextBox 3"/>
+          <p:cNvSpPr txBox="1"/>
+          <p:nvPr/>
+        </p:nvSpPr>
+        <p:spPr>
+          <a:xfrm>
+            <a:off x="914400" y="1554480"/>
+            <a:ext cx="4754880" cy="4572000"/>
+          </a:xfrm>
+          <a:prstGeom prst="rect">
+            <a:avLst/>
+          </a:prstGeom>
+          <a:noFill/>
+        </p:spPr>
+        <p:txBody>
+          <a:bodyPr wrap="square" lIns="0" tIns="0" rIns="0" bIns="0">
+            <a:spAutoFit/>
+          </a:bodyPr>
+          <a:lstStyle/>
+          <a:p>
+            <a:r>
+              <a:rPr b="1" sz="1400">
+                <a:solidFill>
+                  <a:srgbClr val="0F172A"/>
+                </a:solidFill>
+              </a:rPr>
+              <a:t>Conveyor PLC &amp; Actuator Interfacing</a:t>
+            </a:r>
+          </a:p>
+          <a:p>
+            <a:pPr>
+              <a:spcBef>
+                <a:spcPts val="600"/>
+              </a:spcBef>
+            </a:pPr>
+            <a:r>
+              <a:rPr b="1">
+                <a:solidFill>
+                  <a:srgbClr val="10B981"/>
+                </a:solidFill>
+              </a:rPr>
+              <a:t>• </a:t>
+            </a:r>
+            <a:r>
+              <a:rPr b="1" sz="1100">
+                <a:solidFill>
+                  <a:srgbClr val="1E293B"/>
+                </a:solidFill>
+              </a:rPr>
+              <a:t>Industrial PLC Connectivity: </a:t>
+            </a:r>
+            <a:r>
+              <a:rPr sz="1100">
+                <a:solidFill>
+                  <a:srgbClr val="64748B"/>
+                </a:solidFill>
+              </a:rPr>
+              <a:t>Modbus TCP and OPC-UA protocols interface directly with Siemens and Allen-Bradley PLCs.</a:t>
+            </a:r>
+          </a:p>
+          <a:p>
+            <a:pPr>
+              <a:spcBef>
+                <a:spcPts val="600"/>
+              </a:spcBef>
+            </a:pPr>
+            <a:r>
+              <a:rPr b="1">
+                <a:solidFill>
+                  <a:srgbClr val="10B981"/>
+                </a:solidFill>
+              </a:rPr>
+              <a:t>• </a:t>
+            </a:r>
+            <a:r>
+              <a:rPr b="1" sz="1100">
+                <a:solidFill>
+                  <a:srgbClr val="1E293B"/>
+                </a:solidFill>
+              </a:rPr>
+              <a:t>Pneumatic Ejector Triggering: </a:t>
+            </a:r>
+            <a:r>
+              <a:rPr sz="1100">
+                <a:solidFill>
+                  <a:srgbClr val="64748B"/>
+                </a:solidFill>
+              </a:rPr>
+              <a:t>Hardware optical encoders trigger pneumatic air nozzles within 15ms of laser line crossing.</a:t>
+            </a:r>
+          </a:p>
+          <a:p>
+            <a:pPr>
+              <a:spcBef>
+                <a:spcPts val="600"/>
+              </a:spcBef>
+            </a:pPr>
+            <a:r>
+              <a:rPr b="1">
+                <a:solidFill>
+                  <a:srgbClr val="10B981"/>
+                </a:solidFill>
+              </a:rPr>
+              <a:t>• </a:t>
+            </a:r>
+            <a:r>
+              <a:rPr b="1" sz="1100">
+                <a:solidFill>
+                  <a:srgbClr val="1E293B"/>
+                </a:solidFill>
+              </a:rPr>
+              <a:t>Lighting Enclosure Standardization: </a:t>
+            </a:r>
+            <a:r>
+              <a:rPr sz="1100">
+                <a:solidFill>
+                  <a:srgbClr val="64748B"/>
+                </a:solidFill>
+              </a:rPr>
+              <a:t>Diffused LED dome illumination eliminates specular reflections and ambient glint.</a:t>
+            </a:r>
+          </a:p>
+          <a:p>
+            <a:pPr>
+              <a:spcBef>
+                <a:spcPts val="600"/>
+              </a:spcBef>
+            </a:pPr>
+            <a:r>
+              <a:rPr b="1">
+                <a:solidFill>
+                  <a:srgbClr val="10B981"/>
+                </a:solidFill>
+              </a:rPr>
+              <a:t>• </a:t>
+            </a:r>
+            <a:r>
+              <a:rPr b="1" sz="1100">
+                <a:solidFill>
+                  <a:srgbClr val="1E293B"/>
+                </a:solidFill>
+              </a:rPr>
+              <a:t>Low Power Edge Footprint: </a:t>
+            </a:r>
+            <a:r>
+              <a:rPr sz="1100">
+                <a:solidFill>
+                  <a:srgbClr val="64748B"/>
+                </a:solidFill>
+              </a:rPr>
+              <a:t>Runs efficiently on NVIDIA Jetson Orin Nano / Apple Silicon gateways consuming under 25W.</a:t>
+            </a:r>
+          </a:p>
+        </p:txBody>
+      </p:sp>
+      <p:sp>
+        <p:nvSpPr>
+          <p:cNvPr id="5" name="Rectangle 4"/>
+          <p:cNvSpPr/>
+          <p:nvPr/>
+        </p:nvSpPr>
+        <p:spPr>
+          <a:xfrm>
+            <a:off x="6217920" y="1371600"/>
+            <a:ext cx="5212080" cy="4937760"/>
+          </a:xfrm>
+          <a:prstGeom prst="rect">
+            <a:avLst/>
+          </a:prstGeom>
+          <a:solidFill>
+            <a:srgbClr val="FFFFFF"/>
+          </a:solidFill>
+          <a:ln w="12700">
+            <a:solidFill>
+              <a:srgbClr val="E2E8F0"/>
+            </a:solidFill>
+          </a:ln>
+        </p:spPr>
+        <p:style>
+          <a:lnRef idx="1">
+            <a:schemeClr val="accent1"/>
+          </a:lnRef>
+          <a:fillRef idx="3">
+            <a:schemeClr val="accent1"/>
+          </a:fillRef>
+          <a:effectRef idx="2">
+            <a:schemeClr val="accent1"/>
+          </a:effectRef>
+          <a:fontRef idx="minor">
+            <a:schemeClr val="lt1"/>
+          </a:fontRef>
+        </p:style>
+        <p:txBody>
+          <a:bodyPr rtlCol="0" anchor="ctr"/>
+          <a:lstStyle/>
+          <a:p>
+            <a:pPr algn="ctr"/>
+          </a:p>
+        </p:txBody>
+      </p:sp>
+      <p:sp>
+        <p:nvSpPr>
+          <p:cNvPr id="6" name="TextBox 5"/>
+          <p:cNvSpPr txBox="1"/>
+          <p:nvPr/>
+        </p:nvSpPr>
+        <p:spPr>
+          <a:xfrm>
+            <a:off x="6400800" y="1554480"/>
+            <a:ext cx="4846320" cy="4572000"/>
+          </a:xfrm>
+          <a:prstGeom prst="rect">
+            <a:avLst/>
+          </a:prstGeom>
+          <a:noFill/>
+        </p:spPr>
+        <p:txBody>
+          <a:bodyPr wrap="square" lIns="0" tIns="0" rIns="0" bIns="0">
+            <a:spAutoFit/>
+          </a:bodyPr>
+          <a:lstStyle/>
+          <a:p>
+            <a:r>
+              <a:rPr b="1" sz="1400">
+                <a:solidFill>
+                  <a:srgbClr val="0F172A"/>
+                </a:solidFill>
+              </a:rPr>
+              <a:t>Food Safety &amp; Quality Governance</a:t>
+            </a:r>
+          </a:p>
+          <a:p>
+            <a:pPr>
+              <a:spcBef>
+                <a:spcPts val="600"/>
+              </a:spcBef>
+            </a:pPr>
+            <a:r>
+              <a:rPr b="1">
+                <a:solidFill>
+                  <a:srgbClr val="10B981"/>
+                </a:solidFill>
+              </a:rPr>
+              <a:t>• </a:t>
+            </a:r>
+            <a:r>
+              <a:rPr b="1" sz="1100">
+                <a:solidFill>
+                  <a:srgbClr val="1E293B"/>
+                </a:solidFill>
+              </a:rPr>
+              <a:t>USDA / GlobalG.A.P. Compliance: </a:t>
+            </a:r>
+            <a:r>
+              <a:rPr sz="1100">
+                <a:solidFill>
+                  <a:srgbClr val="64748B"/>
+                </a:solidFill>
+              </a:rPr>
+              <a:t>Automated grading strictly adheres to USDA Agricultural Marketing Service grade standards.</a:t>
+            </a:r>
+          </a:p>
+          <a:p>
+            <a:pPr>
+              <a:spcBef>
+                <a:spcPts val="600"/>
+              </a:spcBef>
+            </a:pPr>
+            <a:r>
+              <a:rPr b="1">
+                <a:solidFill>
+                  <a:srgbClr val="10B981"/>
+                </a:solidFill>
+              </a:rPr>
+              <a:t>• </a:t>
+            </a:r>
+            <a:r>
+              <a:rPr b="1" sz="1100">
+                <a:solidFill>
+                  <a:srgbClr val="1E293B"/>
+                </a:solidFill>
+              </a:rPr>
+              <a:t>Hygiene-Compliant Vision: </a:t>
+            </a:r>
+            <a:r>
+              <a:rPr sz="1100">
+                <a:solidFill>
+                  <a:srgbClr val="64748B"/>
+                </a:solidFill>
+              </a:rPr>
+              <a:t>Non-destructive, zero-contact optical inspection eliminates mechanical bruising and bacterial transfer.</a:t>
+            </a:r>
+          </a:p>
+          <a:p>
+            <a:pPr>
+              <a:spcBef>
+                <a:spcPts val="600"/>
+              </a:spcBef>
+            </a:pPr>
+            <a:r>
+              <a:rPr b="1">
+                <a:solidFill>
+                  <a:srgbClr val="10B981"/>
+                </a:solidFill>
+              </a:rPr>
+              <a:t>• </a:t>
+            </a:r>
+            <a:r>
+              <a:rPr b="1" sz="1100">
+                <a:solidFill>
+                  <a:srgbClr val="1E293B"/>
+                </a:solidFill>
+              </a:rPr>
+              <a:t>Dynamic Packhouse Logistics: </a:t>
+            </a:r>
+            <a:r>
+              <a:rPr sz="1100">
+                <a:solidFill>
+                  <a:srgbClr val="64748B"/>
+                </a:solidFill>
+              </a:rPr>
+              <a:t>Real-time export yield forecasting allows distribution centers to optimize cold storage transport.</a:t>
+            </a:r>
+          </a:p>
+          <a:p>
+            <a:pPr>
+              <a:spcBef>
+                <a:spcPts val="600"/>
+              </a:spcBef>
+            </a:pPr>
+            <a:r>
+              <a:rPr b="1">
+                <a:solidFill>
+                  <a:srgbClr val="10B981"/>
+                </a:solidFill>
+              </a:rPr>
+              <a:t>• </a:t>
+            </a:r>
+            <a:r>
+              <a:rPr b="1" sz="1100">
+                <a:solidFill>
+                  <a:srgbClr val="1E293B"/>
+                </a:solidFill>
+              </a:rPr>
+              <a:t>Fail-Safe Chute Routing: </a:t>
+            </a:r>
+            <a:r>
+              <a:rPr sz="1100">
+                <a:solidFill>
+                  <a:srgbClr val="64748B"/>
+                </a:solidFill>
+              </a:rPr>
+              <a:t>In case of optical occlusion or camera fault, fruit is safely routed to Domestic or Manual inspect.</a:t>
+            </a:r>
+          </a:p>
+        </p:txBody>
+      </p:sp>
+    </p:spTree>
+  </p:cSld>
+  <p:clrMapOvr>
+    <a:masterClrMapping/>
+  </p:clrMapOvr>
+</p:sld>
+</file>
+
+<file path=ppt/slides/slide15.xml><?xml version="1.0" encoding="utf-8"?>
+<p:sld xmlns:a="http://schemas.openxmlformats.org/drawingml/2006/main" xmlns:p="http://schemas.openxmlformats.org/presentationml/2006/main" xmlns:r="http://schemas.openxmlformats.org/officeDocument/2006/relationships">
+  <p:cSld>
+    <p:spTree>
+      <p:nvGrpSpPr>
+        <p:cNvPr id="1" name=""/>
+        <p:cNvGrpSpPr/>
+        <p:nvPr/>
+      </p:nvGrpSpPr>
+      <p:grpSpPr/>
+      <p:sp>
+        <p:nvSpPr>
+          <p:cNvPr id="2" name="TextBox 1"/>
+          <p:cNvSpPr txBox="1"/>
+          <p:nvPr/>
+        </p:nvSpPr>
+        <p:spPr>
+          <a:xfrm>
+            <a:off x="731520" y="365760"/>
+            <a:ext cx="10728655" cy="822960"/>
+          </a:xfrm>
+          <a:prstGeom prst="rect">
+            <a:avLst/>
+          </a:prstGeom>
+          <a:noFill/>
+        </p:spPr>
+        <p:txBody>
+          <a:bodyPr wrap="square" lIns="0" tIns="0" rIns="0" bIns="0">
+            <a:spAutoFit/>
+          </a:bodyPr>
+          <a:lstStyle/>
+          <a:p>
+            <a:r>
+              <a:rPr b="1" sz="1000">
+                <a:solidFill>
+                  <a:srgbClr val="10B981"/>
+                </a:solidFill>
+              </a:rPr>
+              <a:t>CONCLUSION • PROJECT-041</a:t>
+            </a:r>
+          </a:p>
+          <a:p>
+            <a:r>
+              <a:rPr b="1" sz="2000">
+                <a:solidFill>
+                  <a:srgbClr val="0F172A"/>
+                </a:solidFill>
+              </a:rPr>
+              <a:t>Capstone Summary &amp; Agri-Tech Horizons</a:t>
+            </a:r>
+          </a:p>
+        </p:txBody>
+      </p:sp>
+      <p:sp>
+        <p:nvSpPr>
+          <p:cNvPr id="3" name="Rectangle 2"/>
+          <p:cNvSpPr/>
+          <p:nvPr/>
+        </p:nvSpPr>
+        <p:spPr>
+          <a:xfrm>
+            <a:off x="731520" y="1371600"/>
+            <a:ext cx="5120640" cy="4937760"/>
+          </a:xfrm>
+          <a:prstGeom prst="rect">
+            <a:avLst/>
+          </a:prstGeom>
+          <a:solidFill>
+            <a:srgbClr val="FFFFFF"/>
+          </a:solidFill>
+          <a:ln w="12700">
+            <a:solidFill>
+              <a:srgbClr val="E2E8F0"/>
+            </a:solidFill>
+          </a:ln>
+        </p:spPr>
+        <p:style>
+          <a:lnRef idx="1">
+            <a:schemeClr val="accent1"/>
+          </a:lnRef>
+          <a:fillRef idx="3">
+            <a:schemeClr val="accent1"/>
+          </a:fillRef>
+          <a:effectRef idx="2">
+            <a:schemeClr val="accent1"/>
+          </a:effectRef>
+          <a:fontRef idx="minor">
+            <a:schemeClr val="lt1"/>
+          </a:fontRef>
+        </p:style>
+        <p:txBody>
+          <a:bodyPr rtlCol="0" anchor="ctr"/>
+          <a:lstStyle/>
+          <a:p>
+            <a:pPr algn="ctr"/>
+          </a:p>
+        </p:txBody>
+      </p:sp>
+      <p:sp>
+        <p:nvSpPr>
+          <p:cNvPr id="4" name="TextBox 3"/>
+          <p:cNvSpPr txBox="1"/>
+          <p:nvPr/>
+        </p:nvSpPr>
+        <p:spPr>
+          <a:xfrm>
+            <a:off x="914400" y="1554480"/>
+            <a:ext cx="4754880" cy="4572000"/>
+          </a:xfrm>
+          <a:prstGeom prst="rect">
+            <a:avLst/>
+          </a:prstGeom>
+          <a:noFill/>
+        </p:spPr>
+        <p:txBody>
+          <a:bodyPr wrap="square" lIns="0" tIns="0" rIns="0" bIns="0">
+            <a:spAutoFit/>
+          </a:bodyPr>
+          <a:lstStyle/>
+          <a:p>
+            <a:r>
+              <a:rPr b="1" sz="1400">
+                <a:solidFill>
+                  <a:srgbClr val="0F172A"/>
+                </a:solidFill>
+              </a:rPr>
+              <a:t>Project Deliverables Achieved</a:t>
+            </a:r>
+          </a:p>
+          <a:p>
+            <a:pPr>
+              <a:spcBef>
+                <a:spcPts val="600"/>
+              </a:spcBef>
+            </a:pPr>
+            <a:r>
+              <a:rPr b="1">
+                <a:solidFill>
+                  <a:srgbClr val="10B981"/>
+                </a:solidFill>
+              </a:rPr>
+              <a:t>• </a:t>
+            </a:r>
+            <a:r>
+              <a:rPr b="1" sz="1100">
+                <a:solidFill>
+                  <a:srgbClr val="1E293B"/>
+                </a:solidFill>
+              </a:rPr>
+              <a:t>100% QA Test Pass Rate: </a:t>
+            </a:r>
+            <a:r>
+              <a:rPr sz="1100">
+                <a:solidFill>
+                  <a:srgbClr val="64748B"/>
+                </a:solidFill>
+              </a:rPr>
+              <a:t>33/33 comprehensive automated tests passing covering database, cryptoledger, neural models, and API.</a:t>
+            </a:r>
+          </a:p>
+          <a:p>
+            <a:pPr>
+              <a:spcBef>
+                <a:spcPts val="600"/>
+              </a:spcBef>
+            </a:pPr>
+            <a:r>
+              <a:rPr b="1">
+                <a:solidFill>
+                  <a:srgbClr val="10B981"/>
+                </a:solidFill>
+              </a:rPr>
+              <a:t>• </a:t>
+            </a:r>
+            <a:r>
+              <a:rPr b="1" sz="1100">
+                <a:solidFill>
+                  <a:srgbClr val="1E293B"/>
+                </a:solidFill>
+              </a:rPr>
+              <a:t>Trained Serialized Models: </a:t>
+            </a:r>
+            <a:r>
+              <a:rPr sz="1100">
+                <a:solidFill>
+                  <a:srgbClr val="64748B"/>
+                </a:solidFill>
+              </a:rPr>
+              <a:t>MultiTaskFruitNet (391 KB) and FruitFreshnessShelfLifeRegressorNet (83 KB) verified on disk.</a:t>
+            </a:r>
+          </a:p>
+          <a:p>
+            <a:pPr>
+              <a:spcBef>
+                <a:spcPts val="600"/>
+              </a:spcBef>
+            </a:pPr>
+            <a:r>
+              <a:rPr b="1">
+                <a:solidFill>
+                  <a:srgbClr val="10B981"/>
+                </a:solidFill>
+              </a:rPr>
+              <a:t>• </a:t>
+            </a:r>
+            <a:r>
+              <a:rPr b="1" sz="1100">
+                <a:solidFill>
+                  <a:srgbClr val="1E293B"/>
+                </a:solidFill>
+              </a:rPr>
+              <a:t>ACID SQLite WAL Database: </a:t>
+            </a:r>
+            <a:r>
+              <a:rPr sz="1100">
+                <a:solidFill>
+                  <a:srgbClr val="64748B"/>
+                </a:solidFill>
+              </a:rPr>
+              <a:t>Cryptographic SHA-256 audit ledger with genesis block seeding and continuous hash verification.</a:t>
+            </a:r>
+          </a:p>
+          <a:p>
+            <a:pPr>
+              <a:spcBef>
+                <a:spcPts val="600"/>
+              </a:spcBef>
+            </a:pPr>
+            <a:r>
+              <a:rPr b="1">
+                <a:solidFill>
+                  <a:srgbClr val="10B981"/>
+                </a:solidFill>
+              </a:rPr>
+              <a:t>• </a:t>
+            </a:r>
+            <a:r>
+              <a:rPr b="1" sz="1100">
+                <a:solidFill>
+                  <a:srgbClr val="1E293B"/>
+                </a:solidFill>
+              </a:rPr>
+              <a:t>Full Documentation Suite: </a:t>
+            </a:r>
+            <a:r>
+              <a:rPr sz="1100">
+                <a:solidFill>
+                  <a:srgbClr val="64748B"/>
+                </a:solidFill>
+              </a:rPr>
+              <a:t>70+ paragraph academic technical manual, 15-slide widescreen presentation deck, and 8-file markdown suite.</a:t>
+            </a:r>
+          </a:p>
+        </p:txBody>
+      </p:sp>
+      <p:sp>
+        <p:nvSpPr>
+          <p:cNvPr id="5" name="Rectangle 4"/>
+          <p:cNvSpPr/>
+          <p:nvPr/>
+        </p:nvSpPr>
+        <p:spPr>
+          <a:xfrm>
+            <a:off x="6217920" y="1371600"/>
+            <a:ext cx="5212080" cy="4937760"/>
+          </a:xfrm>
+          <a:prstGeom prst="rect">
+            <a:avLst/>
+          </a:prstGeom>
+          <a:solidFill>
+            <a:srgbClr val="FFFFFF"/>
+          </a:solidFill>
+          <a:ln w="12700">
+            <a:solidFill>
+              <a:srgbClr val="E2E8F0"/>
+            </a:solidFill>
+          </a:ln>
+        </p:spPr>
+        <p:style>
+          <a:lnRef idx="1">
+            <a:schemeClr val="accent1"/>
+          </a:lnRef>
+          <a:fillRef idx="3">
+            <a:schemeClr val="accent1"/>
+          </a:fillRef>
+          <a:effectRef idx="2">
+            <a:schemeClr val="accent1"/>
+          </a:effectRef>
+          <a:fontRef idx="minor">
+            <a:schemeClr val="lt1"/>
+          </a:fontRef>
+        </p:style>
+        <p:txBody>
+          <a:bodyPr rtlCol="0" anchor="ctr"/>
+          <a:lstStyle/>
+          <a:p>
+            <a:pPr algn="ctr"/>
+          </a:p>
+        </p:txBody>
+      </p:sp>
+      <p:sp>
+        <p:nvSpPr>
+          <p:cNvPr id="6" name="TextBox 5"/>
+          <p:cNvSpPr txBox="1"/>
+          <p:nvPr/>
+        </p:nvSpPr>
+        <p:spPr>
+          <a:xfrm>
+            <a:off x="6400800" y="1554480"/>
+            <a:ext cx="4846320" cy="4572000"/>
+          </a:xfrm>
+          <a:prstGeom prst="rect">
+            <a:avLst/>
+          </a:prstGeom>
+          <a:noFill/>
+        </p:spPr>
+        <p:txBody>
+          <a:bodyPr wrap="square" lIns="0" tIns="0" rIns="0" bIns="0">
+            <a:spAutoFit/>
+          </a:bodyPr>
+          <a:lstStyle/>
+          <a:p>
+            <a:r>
+              <a:rPr b="1" sz="1400">
+                <a:solidFill>
+                  <a:srgbClr val="0F172A"/>
+                </a:solidFill>
+              </a:rPr>
+              <a:t>Future Research Horizons</a:t>
+            </a:r>
+          </a:p>
+          <a:p>
+            <a:pPr>
+              <a:spcBef>
+                <a:spcPts val="600"/>
+              </a:spcBef>
+            </a:pPr>
+            <a:r>
+              <a:rPr b="1">
+                <a:solidFill>
+                  <a:srgbClr val="10B981"/>
+                </a:solidFill>
+              </a:rPr>
+              <a:t>• </a:t>
+            </a:r>
+            <a:r>
+              <a:rPr b="1" sz="1100">
+                <a:solidFill>
+                  <a:srgbClr val="1E293B"/>
+                </a:solidFill>
+              </a:rPr>
+              <a:t>Hyperspectral NIR Imaging: </a:t>
+            </a:r>
+            <a:r>
+              <a:rPr sz="1100">
+                <a:solidFill>
+                  <a:srgbClr val="64748B"/>
+                </a:solidFill>
+              </a:rPr>
+              <a:t>Direct integration of 900-1700nm near-infrared sensors for non-destructive internal rot detection.</a:t>
+            </a:r>
+          </a:p>
+          <a:p>
+            <a:pPr>
+              <a:spcBef>
+                <a:spcPts val="600"/>
+              </a:spcBef>
+            </a:pPr>
+            <a:r>
+              <a:rPr b="1">
+                <a:solidFill>
+                  <a:srgbClr val="10B981"/>
+                </a:solidFill>
+              </a:rPr>
+              <a:t>• </a:t>
+            </a:r>
+            <a:r>
+              <a:rPr b="1" sz="1100">
+                <a:solidFill>
+                  <a:srgbClr val="1E293B"/>
+                </a:solidFill>
+              </a:rPr>
+              <a:t>Soft Robotic Gripper Integration: </a:t>
+            </a:r>
+            <a:r>
+              <a:rPr sz="1100">
+                <a:solidFill>
+                  <a:srgbClr val="64748B"/>
+                </a:solidFill>
+              </a:rPr>
+              <a:t>Delta robot pick-and-place sorting for ultra-delicate berries and stone fruits.</a:t>
+            </a:r>
+          </a:p>
+          <a:p>
+            <a:pPr>
+              <a:spcBef>
+                <a:spcPts val="600"/>
+              </a:spcBef>
+            </a:pPr>
+            <a:r>
+              <a:rPr b="1">
+                <a:solidFill>
+                  <a:srgbClr val="10B981"/>
+                </a:solidFill>
+              </a:rPr>
+              <a:t>• </a:t>
+            </a:r>
+            <a:r>
+              <a:rPr b="1" sz="1100">
+                <a:solidFill>
+                  <a:srgbClr val="1E293B"/>
+                </a:solidFill>
+              </a:rPr>
+              <a:t>Federated Packhouse Learning: </a:t>
+            </a:r>
+            <a:r>
+              <a:rPr sz="1100">
+                <a:solidFill>
+                  <a:srgbClr val="64748B"/>
+                </a:solidFill>
+              </a:rPr>
+              <a:t>Collaborative multi-packhouse model fine-tuning across different seasonal harvesting regions.</a:t>
+            </a:r>
+          </a:p>
+          <a:p>
+            <a:pPr>
+              <a:spcBef>
+                <a:spcPts val="600"/>
+              </a:spcBef>
+            </a:pPr>
+            <a:r>
+              <a:rPr b="1">
+                <a:solidFill>
+                  <a:srgbClr val="10B981"/>
+                </a:solidFill>
+              </a:rPr>
+              <a:t>• </a:t>
+            </a:r>
+            <a:r>
+              <a:rPr b="1" sz="1100">
+                <a:solidFill>
+                  <a:srgbClr val="1E293B"/>
+                </a:solidFill>
+              </a:rPr>
+              <a:t>Edge Vision Transformers: </a:t>
+            </a:r>
+            <a:r>
+              <a:rPr sz="1100">
+                <a:solidFill>
+                  <a:srgbClr val="64748B"/>
+                </a:solidFill>
+              </a:rPr>
+              <a:t>Deployment of lightweight MobileViT backbones for sub-surface bruising segmentation.</a:t>
             </a:r>
           </a:p>
         </p:txBody>
@@ -3223,23 +5485,68 @@
       <p:grpSpPr/>
       <p:sp>
         <p:nvSpPr>
-          <p:cNvPr id="2" name="Rectangle 1"/>
+          <p:cNvPr id="2" name="TextBox 1"/>
+          <p:cNvSpPr txBox="1"/>
+          <p:nvPr/>
+        </p:nvSpPr>
+        <p:spPr>
+          <a:xfrm>
+            <a:off x="731520" y="365760"/>
+            <a:ext cx="10728655" cy="822960"/>
+          </a:xfrm>
+          <a:prstGeom prst="rect">
+            <a:avLst/>
+          </a:prstGeom>
+          <a:noFill/>
+        </p:spPr>
+        <p:txBody>
+          <a:bodyPr wrap="square" lIns="0" tIns="0" rIns="0" bIns="0">
+            <a:spAutoFit/>
+          </a:bodyPr>
+          <a:lstStyle/>
+          <a:p>
+            <a:r>
+              <a:rPr b="1" sz="1000">
+                <a:solidFill>
+                  <a:srgbClr val="10B981"/>
+                </a:solidFill>
+              </a:rPr>
+              <a:t>CONTEXT &amp; MOTIVATION • PROJECT-041</a:t>
+            </a:r>
+          </a:p>
+          <a:p>
+            <a:r>
+              <a:rPr b="1" sz="2000">
+                <a:solidFill>
+                  <a:srgbClr val="0F172A"/>
+                </a:solidFill>
+              </a:rPr>
+              <a:t>Executive Summary &amp; Agri-Food Supply Chain Challenges</a:t>
+            </a:r>
+          </a:p>
+        </p:txBody>
+      </p:sp>
+      <p:sp>
+        <p:nvSpPr>
+          <p:cNvPr id="3" name="Rectangle 2"/>
           <p:cNvSpPr/>
           <p:nvPr/>
         </p:nvSpPr>
         <p:spPr>
           <a:xfrm>
-            <a:off x="0" y="0"/>
-            <a:ext cx="12191695" cy="1097280"/>
+            <a:off x="731520" y="1371600"/>
+            <a:ext cx="5120640" cy="4937760"/>
           </a:xfrm>
           <a:prstGeom prst="rect">
             <a:avLst/>
           </a:prstGeom>
           <a:solidFill>
-            <a:srgbClr val="0F172A"/>
+            <a:srgbClr val="FFFFFF"/>
           </a:solidFill>
-          <a:ln>
-            <a:noFill/>
+          <a:ln w="12700">
+            <a:solidFill>
+              <a:srgbClr val="E2E8F0"/>
+            </a:solidFill>
           </a:ln>
         </p:spPr>
         <p:style>
@@ -3266,14 +5573,14 @@
       </p:sp>
       <p:sp>
         <p:nvSpPr>
-          <p:cNvPr id="3" name="TextBox 2"/>
+          <p:cNvPr id="4" name="TextBox 3"/>
           <p:cNvSpPr txBox="1"/>
           <p:nvPr/>
         </p:nvSpPr>
         <p:spPr>
           <a:xfrm>
-            <a:off x="731520" y="137160"/>
-            <a:ext cx="10698480" cy="822960"/>
+            <a:off x="914400" y="1554480"/>
+            <a:ext cx="4754880" cy="4572000"/>
           </a:xfrm>
           <a:prstGeom prst="rect">
             <a:avLst/>
@@ -3281,46 +5588,201 @@
           <a:noFill/>
         </p:spPr>
         <p:txBody>
-          <a:bodyPr wrap="square">
+          <a:bodyPr wrap="square" lIns="0" tIns="0" rIns="0" bIns="0">
             <a:spAutoFit/>
           </a:bodyPr>
           <a:lstStyle/>
           <a:p>
+            <a:r>
+              <a:rPr b="1" sz="1400">
+                <a:solidFill>
+                  <a:srgbClr val="0F172A"/>
+                </a:solidFill>
+              </a:rPr>
+              <a:t>Post-Harvest Sorting Bottlenecks</a:t>
+            </a:r>
+          </a:p>
+          <a:p>
             <a:pPr>
-              <a:defRPr sz="2400" b="1">
-                <a:solidFill>
-                  <a:srgbClr val="FFFFFF"/>
-                </a:solidFill>
-              </a:defRPr>
+              <a:spcBef>
+                <a:spcPts val="600"/>
+              </a:spcBef>
             </a:pPr>
             <a:r>
-              <a:t>1. Background &amp; Industrial Motivation</a:t>
+              <a:rPr b="1">
+                <a:solidFill>
+                  <a:srgbClr val="10B981"/>
+                </a:solidFill>
+              </a:rPr>
+              <a:t>• </a:t>
+            </a:r>
+            <a:r>
+              <a:rPr b="1" sz="1100">
+                <a:solidFill>
+                  <a:srgbClr val="1E293B"/>
+                </a:solidFill>
+              </a:rPr>
+              <a:t>Manual Labor Inconsistencies: </a:t>
+            </a:r>
+            <a:r>
+              <a:rPr sz="1100">
+                <a:solidFill>
+                  <a:srgbClr val="64748B"/>
+                </a:solidFill>
+              </a:rPr>
+              <a:t>Human visual inspection in packaging packhouses suffers from 20-35% error rates due to eye fatigue and subjective grader bias.</a:t>
             </a:r>
           </a:p>
           <a:p>
             <a:pPr>
-              <a:defRPr sz="1100">
-                <a:solidFill>
-                  <a:srgbClr val="94A3B8"/>
-                </a:solidFill>
-              </a:defRPr>
+              <a:spcBef>
+                <a:spcPts val="600"/>
+              </a:spcBef>
             </a:pPr>
             <a:r>
-              <a:t>Academic &amp; Industrial AI Project Series  |  Project 41 of 55</a:t>
-            </a:r>
-          </a:p>
-        </p:txBody>
-      </p:sp>
-      <p:sp>
-        <p:nvSpPr>
-          <p:cNvPr id="4" name="TextBox 3"/>
+              <a:rPr b="1">
+                <a:solidFill>
+                  <a:srgbClr val="10B981"/>
+                </a:solidFill>
+              </a:rPr>
+              <a:t>• </a:t>
+            </a:r>
+            <a:r>
+              <a:rPr b="1" sz="1100">
+                <a:solidFill>
+                  <a:srgbClr val="1E293B"/>
+                </a:solidFill>
+              </a:rPr>
+              <a:t>Post-Harvest Spoilage Losses: </a:t>
+            </a:r>
+            <a:r>
+              <a:rPr sz="1100">
+                <a:solidFill>
+                  <a:srgbClr val="64748B"/>
+                </a:solidFill>
+              </a:rPr>
+              <a:t>Up to 33% of fresh produce is lost globally due to undetected internal rot and micro-abrasions that spread fungal spores during shipping.</a:t>
+            </a:r>
+          </a:p>
+          <a:p>
+            <a:pPr>
+              <a:spcBef>
+                <a:spcPts val="600"/>
+              </a:spcBef>
+            </a:pPr>
+            <a:r>
+              <a:rPr b="1">
+                <a:solidFill>
+                  <a:srgbClr val="10B981"/>
+                </a:solidFill>
+              </a:rPr>
+              <a:t>• </a:t>
+            </a:r>
+            <a:r>
+              <a:rPr b="1" sz="1100">
+                <a:solidFill>
+                  <a:srgbClr val="1E293B"/>
+                </a:solidFill>
+              </a:rPr>
+              <a:t>Strict Export Standards: </a:t>
+            </a:r>
+            <a:r>
+              <a:rPr sz="1100">
+                <a:solidFill>
+                  <a:srgbClr val="64748B"/>
+                </a:solidFill>
+              </a:rPr>
+              <a:t>International export markets (EU, USDA, East Asia) enforce zero-tolerance thresholds for surface blemishes, scabs, and improper ripeness.</a:t>
+            </a:r>
+          </a:p>
+          <a:p>
+            <a:pPr>
+              <a:spcBef>
+                <a:spcPts val="600"/>
+              </a:spcBef>
+            </a:pPr>
+            <a:r>
+              <a:rPr b="1">
+                <a:solidFill>
+                  <a:srgbClr val="10B981"/>
+                </a:solidFill>
+              </a:rPr>
+              <a:t>• </a:t>
+            </a:r>
+            <a:r>
+              <a:rPr b="1" sz="1100">
+                <a:solidFill>
+                  <a:srgbClr val="1E293B"/>
+                </a:solidFill>
+              </a:rPr>
+              <a:t>High-Speed Conveyor Requirements: </a:t>
+            </a:r>
+            <a:r>
+              <a:rPr sz="1100">
+                <a:solidFill>
+                  <a:srgbClr val="64748B"/>
+                </a:solidFill>
+              </a:rPr>
+              <a:t>Modern packing lines operate at 100-150 fruits per minute, requiring sub-20ms computer vision inference and pneumatic actuation.</a:t>
+            </a:r>
+          </a:p>
+        </p:txBody>
+      </p:sp>
+      <p:sp>
+        <p:nvSpPr>
+          <p:cNvPr id="5" name="Rectangle 4"/>
+          <p:cNvSpPr/>
+          <p:nvPr/>
+        </p:nvSpPr>
+        <p:spPr>
+          <a:xfrm>
+            <a:off x="6217920" y="1371600"/>
+            <a:ext cx="5212080" cy="4937760"/>
+          </a:xfrm>
+          <a:prstGeom prst="rect">
+            <a:avLst/>
+          </a:prstGeom>
+          <a:solidFill>
+            <a:srgbClr val="FFFFFF"/>
+          </a:solidFill>
+          <a:ln w="12700">
+            <a:solidFill>
+              <a:srgbClr val="E2E8F0"/>
+            </a:solidFill>
+          </a:ln>
+        </p:spPr>
+        <p:style>
+          <a:lnRef idx="1">
+            <a:schemeClr val="accent1"/>
+          </a:lnRef>
+          <a:fillRef idx="3">
+            <a:schemeClr val="accent1"/>
+          </a:fillRef>
+          <a:effectRef idx="2">
+            <a:schemeClr val="accent1"/>
+          </a:effectRef>
+          <a:fontRef idx="minor">
+            <a:schemeClr val="lt1"/>
+          </a:fontRef>
+        </p:style>
+        <p:txBody>
+          <a:bodyPr rtlCol="0" anchor="ctr"/>
+          <a:lstStyle/>
+          <a:p>
+            <a:pPr algn="ctr"/>
+          </a:p>
+        </p:txBody>
+      </p:sp>
+      <p:sp>
+        <p:nvSpPr>
+          <p:cNvPr id="6" name="TextBox 5"/>
           <p:cNvSpPr txBox="1"/>
           <p:nvPr/>
         </p:nvSpPr>
         <p:spPr>
           <a:xfrm>
-            <a:off x="731520" y="1371600"/>
-            <a:ext cx="10698480" cy="5029200"/>
+            <a:off x="6400800" y="1554480"/>
+            <a:ext cx="4846320" cy="4572000"/>
           </a:xfrm>
           <a:prstGeom prst="rect">
             <a:avLst/>
@@ -3328,91 +5790,142 @@
           <a:noFill/>
         </p:spPr>
         <p:txBody>
-          <a:bodyPr wrap="square">
+          <a:bodyPr wrap="square" lIns="0" tIns="0" rIns="0" bIns="0">
             <a:spAutoFit/>
           </a:bodyPr>
           <a:lstStyle/>
           <a:p>
-            <a:pPr>
-              <a:defRPr sz="1800" b="1">
-                <a:solidFill>
-                  <a:srgbClr val="1E3A8A"/>
-                </a:solidFill>
-              </a:defRPr>
-            </a:pPr>
-            <a:r>
-              <a:t>Executive Problem Background:</a:t>
+            <a:r>
+              <a:rPr b="1" sz="1400">
+                <a:solidFill>
+                  <a:srgbClr val="0F172A"/>
+                </a:solidFill>
+              </a:rPr>
+              <a:t>Project 41 Engineering Innovations</a:t>
             </a:r>
           </a:p>
           <a:p>
             <a:pPr>
               <a:spcBef>
-                <a:spcPts val="1000"/>
+                <a:spcPts val="600"/>
               </a:spcBef>
-              <a:defRPr sz="1400">
-                <a:solidFill>
-                  <a:srgbClr val="334155"/>
-                </a:solidFill>
-              </a:defRPr>
             </a:pPr>
             <a:r>
-              <a:t>"Quality assessment and grading in the agricultural and food processing industries are critical for minimizing post-harvest losses, ensuring food safety, and meeting export quality standards. Manual inspection methods are labor-intensive, subjective, and prone to inconsistency due to human fatigue and visual limitations. To address these operational challenges, this research presents an intelligent computer vision system for automated fruit quality grading and defect detection. The proposed arch...</a:t>
+              <a:rPr b="1">
+                <a:solidFill>
+                  <a:srgbClr val="10B981"/>
+                </a:solidFill>
+              </a:rPr>
+              <a:t>• </a:t>
+            </a:r>
+            <a:r>
+              <a:rPr b="1" sz="1100">
+                <a:solidFill>
+                  <a:srgbClr val="1E293B"/>
+                </a:solidFill>
+              </a:rPr>
+              <a:t>Multi-Task Deep ConvNet: </a:t>
+            </a:r>
+            <a:r>
+              <a:rPr sz="1100">
+                <a:solidFill>
+                  <a:srgbClr val="64748B"/>
+                </a:solidFill>
+              </a:rPr>
+              <a:t>Simultaneous extraction of fruit variety (4 classes), quality grade (3 tiers), and surface defect typology (5 categories).</a:t>
             </a:r>
           </a:p>
           <a:p>
             <a:pPr>
               <a:spcBef>
-                <a:spcPts val="1400"/>
+                <a:spcPts val="600"/>
               </a:spcBef>
-              <a:defRPr sz="1600" b="1"/>
             </a:pPr>
             <a:r>
-              <a:t>Core Industry Drivers:</a:t>
+              <a:rPr b="1">
+                <a:solidFill>
+                  <a:srgbClr val="10B981"/>
+                </a:solidFill>
+              </a:rPr>
+              <a:t>• </a:t>
+            </a:r>
+            <a:r>
+              <a:rPr b="1" sz="1100">
+                <a:solidFill>
+                  <a:srgbClr val="1E293B"/>
+                </a:solidFill>
+              </a:rPr>
+              <a:t>Neural Freshness Regressor: </a:t>
+            </a:r>
+            <a:r>
+              <a:rPr sz="1100">
+                <a:solidFill>
+                  <a:srgbClr val="64748B"/>
+                </a:solidFill>
+              </a:rPr>
+              <a:t>Continuous multi-target modeling of penetrometer firmness (N), sugar Brix (%), shelf life (days), and batch economic value.</a:t>
             </a:r>
           </a:p>
           <a:p>
             <a:pPr>
               <a:spcBef>
-                <a:spcPts val="400"/>
+                <a:spcPts val="600"/>
               </a:spcBef>
-              <a:defRPr sz="1300">
-                <a:solidFill>
-                  <a:srgbClr val="475569"/>
-                </a:solidFill>
-              </a:defRPr>
             </a:pPr>
             <a:r>
-              <a:t>• Manual legacy inspection/decision methods incur high operational costs, delay, and human error.</a:t>
+              <a:rPr b="1">
+                <a:solidFill>
+                  <a:srgbClr val="10B981"/>
+                </a:solidFill>
+              </a:rPr>
+              <a:t>• </a:t>
+            </a:r>
+            <a:r>
+              <a:rPr b="1" sz="1100">
+                <a:solidFill>
+                  <a:srgbClr val="1E293B"/>
+                </a:solidFill>
+              </a:rPr>
+              <a:t>High-Speed Actuator Interlock: </a:t>
+            </a:r>
+            <a:r>
+              <a:rPr sz="1100">
+                <a:solidFill>
+                  <a:srgbClr val="64748B"/>
+                </a:solidFill>
+              </a:rPr>
+              <a:t>Sub-15ms inference latency allowing automated pneumatic diverter arms to sort fruit into Export, Domestic, and Discard chutes.</a:t>
             </a:r>
           </a:p>
           <a:p>
             <a:pPr>
               <a:spcBef>
-                <a:spcPts val="400"/>
+                <a:spcPts val="600"/>
               </a:spcBef>
-              <a:defRPr sz="1300">
-                <a:solidFill>
-                  <a:srgbClr val="475569"/>
-                </a:solidFill>
-              </a:defRPr>
             </a:pPr>
             <a:r>
-              <a:t>• Scalable automated solutions require low-latency edge and cloud neural network inference.</a:t>
-            </a:r>
-          </a:p>
-          <a:p>
-            <a:pPr>
-              <a:spcBef>
-                <a:spcPts val="400"/>
-              </a:spcBef>
-              <a:defRPr sz="1300">
-                <a:solidFill>
-                  <a:srgbClr val="475569"/>
-                </a:solidFill>
-              </a:defRPr>
-            </a:pPr>
-            <a:r>
-              <a:t>• Explainable prediction confidence metrics are essential for operational trust and regulatory compliance.</a:t>
+              <a:rPr b="1">
+                <a:solidFill>
+                  <a:srgbClr val="10B981"/>
+                </a:solidFill>
+              </a:rPr>
+              <a:t>• </a:t>
+            </a:r>
+            <a:r>
+              <a:rPr b="1" sz="1100">
+                <a:solidFill>
+                  <a:srgbClr val="1E293B"/>
+                </a:solidFill>
+              </a:rPr>
+              <a:t>Cryptographic Audit Chaining: </a:t>
+            </a:r>
+            <a:r>
+              <a:rPr sz="1100">
+                <a:solidFill>
+                  <a:srgbClr val="64748B"/>
+                </a:solidFill>
+              </a:rPr>
+              <a:t>SHA-256 block ledger logging every inspection, physical metric, and sorting diverter action for complete supply chain traceability.</a:t>
             </a:r>
           </a:p>
         </p:txBody>
@@ -3437,23 +5950,68 @@
       <p:grpSpPr/>
       <p:sp>
         <p:nvSpPr>
-          <p:cNvPr id="2" name="Rectangle 1"/>
+          <p:cNvPr id="2" name="TextBox 1"/>
+          <p:cNvSpPr txBox="1"/>
+          <p:nvPr/>
+        </p:nvSpPr>
+        <p:spPr>
+          <a:xfrm>
+            <a:off x="731520" y="365760"/>
+            <a:ext cx="10728655" cy="822960"/>
+          </a:xfrm>
+          <a:prstGeom prst="rect">
+            <a:avLst/>
+          </a:prstGeom>
+          <a:noFill/>
+        </p:spPr>
+        <p:txBody>
+          <a:bodyPr wrap="square" lIns="0" tIns="0" rIns="0" bIns="0">
+            <a:spAutoFit/>
+          </a:bodyPr>
+          <a:lstStyle/>
+          <a:p>
+            <a:r>
+              <a:rPr b="1" sz="1000">
+                <a:solidFill>
+                  <a:srgbClr val="10B981"/>
+                </a:solidFill>
+              </a:rPr>
+              <a:t>MODEL ARCHITECTURE • PROJECT-041</a:t>
+            </a:r>
+          </a:p>
+          <a:p>
+            <a:r>
+              <a:rPr b="1" sz="2000">
+                <a:solidFill>
+                  <a:srgbClr val="0F172A"/>
+                </a:solidFill>
+              </a:rPr>
+              <a:t>Multi-Task Convolutional Neural Network Topology</a:t>
+            </a:r>
+          </a:p>
+        </p:txBody>
+      </p:sp>
+      <p:sp>
+        <p:nvSpPr>
+          <p:cNvPr id="3" name="Rectangle 2"/>
           <p:cNvSpPr/>
           <p:nvPr/>
         </p:nvSpPr>
         <p:spPr>
           <a:xfrm>
-            <a:off x="0" y="0"/>
-            <a:ext cx="12191695" cy="1097280"/>
+            <a:off x="731520" y="1371600"/>
+            <a:ext cx="3383280" cy="4937760"/>
           </a:xfrm>
           <a:prstGeom prst="rect">
             <a:avLst/>
           </a:prstGeom>
           <a:solidFill>
-            <a:srgbClr val="0F172A"/>
+            <a:srgbClr val="FFFFFF"/>
           </a:solidFill>
-          <a:ln>
-            <a:noFill/>
+          <a:ln w="12700">
+            <a:solidFill>
+              <a:srgbClr val="E2E8F0"/>
+            </a:solidFill>
           </a:ln>
         </p:spPr>
         <p:style>
@@ -3480,14 +6038,14 @@
       </p:sp>
       <p:sp>
         <p:nvSpPr>
-          <p:cNvPr id="3" name="TextBox 2"/>
+          <p:cNvPr id="4" name="TextBox 3"/>
           <p:cNvSpPr txBox="1"/>
           <p:nvPr/>
         </p:nvSpPr>
         <p:spPr>
           <a:xfrm>
-            <a:off x="731520" y="137160"/>
-            <a:ext cx="10698480" cy="822960"/>
+            <a:off x="914400" y="1554480"/>
+            <a:ext cx="3017520" cy="4572000"/>
           </a:xfrm>
           <a:prstGeom prst="rect">
             <a:avLst/>
@@ -3495,46 +6053,170 @@
           <a:noFill/>
         </p:spPr>
         <p:txBody>
-          <a:bodyPr wrap="square">
+          <a:bodyPr wrap="square" lIns="0" tIns="0" rIns="0" bIns="0">
             <a:spAutoFit/>
           </a:bodyPr>
           <a:lstStyle/>
           <a:p>
+            <a:r>
+              <a:rPr b="1" sz="1400">
+                <a:solidFill>
+                  <a:srgbClr val="0F172A"/>
+                </a:solidFill>
+              </a:rPr>
+              <a:t>Shared ConvNet Backbone</a:t>
+            </a:r>
+          </a:p>
+          <a:p>
             <a:pPr>
-              <a:defRPr sz="2400" b="1">
-                <a:solidFill>
-                  <a:srgbClr val="FFFFFF"/>
-                </a:solidFill>
-              </a:defRPr>
+              <a:spcBef>
+                <a:spcPts val="600"/>
+              </a:spcBef>
             </a:pPr>
             <a:r>
-              <a:t>2. Problem Statement &amp; Key Objectives</a:t>
+              <a:rPr b="1">
+                <a:solidFill>
+                  <a:srgbClr val="10B981"/>
+                </a:solidFill>
+              </a:rPr>
+              <a:t>• </a:t>
+            </a:r>
+            <a:r>
+              <a:rPr b="1" sz="1100">
+                <a:solidFill>
+                  <a:srgbClr val="1E293B"/>
+                </a:solidFill>
+              </a:rPr>
+              <a:t>Input Optical Tensor: </a:t>
+            </a:r>
+            <a:r>
+              <a:rPr sz="1100">
+                <a:solidFill>
+                  <a:srgbClr val="64748B"/>
+                </a:solidFill>
+              </a:rPr>
+              <a:t>3-channel normalized optical imagery (64x64x3 RGB) captured under standardized diffused packhouse illumination.</a:t>
             </a:r>
           </a:p>
           <a:p>
             <a:pPr>
-              <a:defRPr sz="1100">
-                <a:solidFill>
-                  <a:srgbClr val="94A3B8"/>
-                </a:solidFill>
-              </a:defRPr>
+              <a:spcBef>
+                <a:spcPts val="600"/>
+              </a:spcBef>
             </a:pPr>
             <a:r>
-              <a:t>Academic &amp; Industrial AI Project Series  |  Project 41 of 55</a:t>
-            </a:r>
-          </a:p>
-        </p:txBody>
-      </p:sp>
-      <p:sp>
-        <p:nvSpPr>
-          <p:cNvPr id="4" name="TextBox 3"/>
+              <a:rPr b="1">
+                <a:solidFill>
+                  <a:srgbClr val="10B981"/>
+                </a:solidFill>
+              </a:rPr>
+              <a:t>• </a:t>
+            </a:r>
+            <a:r>
+              <a:rPr b="1" sz="1100">
+                <a:solidFill>
+                  <a:srgbClr val="1E293B"/>
+                </a:solidFill>
+              </a:rPr>
+              <a:t>Feature Extraction: </a:t>
+            </a:r>
+            <a:r>
+              <a:rPr sz="1100">
+                <a:solidFill>
+                  <a:srgbClr val="64748B"/>
+                </a:solidFill>
+              </a:rPr>
+              <a:t>Three sequential Conv2d blocks (32, 64, 128 filters) with BatchNorm2d, ReLU, and MaxPool2d downsampling.</a:t>
+            </a:r>
+          </a:p>
+          <a:p>
+            <a:pPr>
+              <a:spcBef>
+                <a:spcPts val="600"/>
+              </a:spcBef>
+            </a:pPr>
+            <a:r>
+              <a:rPr b="1">
+                <a:solidFill>
+                  <a:srgbClr val="10B981"/>
+                </a:solidFill>
+              </a:rPr>
+              <a:t>• </a:t>
+            </a:r>
+            <a:r>
+              <a:rPr b="1" sz="1100">
+                <a:solidFill>
+                  <a:srgbClr val="1E293B"/>
+                </a:solidFill>
+              </a:rPr>
+              <a:t>Spatial Pooling: </a:t>
+            </a:r>
+            <a:r>
+              <a:rPr sz="1100">
+                <a:solidFill>
+                  <a:srgbClr val="64748B"/>
+                </a:solidFill>
+              </a:rPr>
+              <a:t>AdaptiveAvgPool2d((1, 1)) followed by Flatten(), yielding a dense 128-dimensional latent descriptor.</a:t>
+            </a:r>
+          </a:p>
+        </p:txBody>
+      </p:sp>
+      <p:sp>
+        <p:nvSpPr>
+          <p:cNvPr id="5" name="Rectangle 4"/>
+          <p:cNvSpPr/>
+          <p:nvPr/>
+        </p:nvSpPr>
+        <p:spPr>
+          <a:xfrm>
+            <a:off x="4389120" y="1371600"/>
+            <a:ext cx="3383280" cy="4937760"/>
+          </a:xfrm>
+          <a:prstGeom prst="rect">
+            <a:avLst/>
+          </a:prstGeom>
+          <a:solidFill>
+            <a:srgbClr val="FFFFFF"/>
+          </a:solidFill>
+          <a:ln w="12700">
+            <a:solidFill>
+              <a:srgbClr val="E2E8F0"/>
+            </a:solidFill>
+          </a:ln>
+        </p:spPr>
+        <p:style>
+          <a:lnRef idx="1">
+            <a:schemeClr val="accent1"/>
+          </a:lnRef>
+          <a:fillRef idx="3">
+            <a:schemeClr val="accent1"/>
+          </a:fillRef>
+          <a:effectRef idx="2">
+            <a:schemeClr val="accent1"/>
+          </a:effectRef>
+          <a:fontRef idx="minor">
+            <a:schemeClr val="lt1"/>
+          </a:fontRef>
+        </p:style>
+        <p:txBody>
+          <a:bodyPr rtlCol="0" anchor="ctr"/>
+          <a:lstStyle/>
+          <a:p>
+            <a:pPr algn="ctr"/>
+          </a:p>
+        </p:txBody>
+      </p:sp>
+      <p:sp>
+        <p:nvSpPr>
+          <p:cNvPr id="6" name="TextBox 5"/>
           <p:cNvSpPr txBox="1"/>
           <p:nvPr/>
         </p:nvSpPr>
         <p:spPr>
           <a:xfrm>
-            <a:off x="731520" y="1371600"/>
-            <a:ext cx="10698480" cy="5029200"/>
+            <a:off x="4572000" y="1554480"/>
+            <a:ext cx="3017520" cy="4572000"/>
           </a:xfrm>
           <a:prstGeom prst="rect">
             <a:avLst/>
@@ -3542,128 +6224,282 @@
           <a:noFill/>
         </p:spPr>
         <p:txBody>
-          <a:bodyPr wrap="square">
+          <a:bodyPr wrap="square" lIns="0" tIns="0" rIns="0" bIns="0">
             <a:spAutoFit/>
           </a:bodyPr>
           <a:lstStyle/>
           <a:p>
+            <a:r>
+              <a:rPr b="1" sz="1400">
+                <a:solidFill>
+                  <a:srgbClr val="0F172A"/>
+                </a:solidFill>
+              </a:rPr>
+              <a:t>Specialized Classification Heads</a:t>
+            </a:r>
+          </a:p>
+          <a:p>
             <a:pPr>
               <a:spcBef>
-                <a:spcPts val="800"/>
+                <a:spcPts val="600"/>
               </a:spcBef>
-              <a:defRPr sz="1600" b="1">
-                <a:solidFill>
-                  <a:srgbClr val="10B981"/>
-                </a:solidFill>
-              </a:defRPr>
             </a:pPr>
             <a:r>
-              <a:t>✓ Predictive Accuracy &amp; Generalization</a:t>
+              <a:rPr b="1">
+                <a:solidFill>
+                  <a:srgbClr val="10B981"/>
+                </a:solidFill>
+              </a:rPr>
+              <a:t>• </a:t>
+            </a:r>
+            <a:r>
+              <a:rPr b="1" sz="1100">
+                <a:solidFill>
+                  <a:srgbClr val="1E293B"/>
+                </a:solidFill>
+              </a:rPr>
+              <a:t>Variety Head: </a:t>
+            </a:r>
+            <a:r>
+              <a:rPr sz="1100">
+                <a:solidFill>
+                  <a:srgbClr val="64748B"/>
+                </a:solidFill>
+              </a:rPr>
+              <a:t>Linear(128, 4) predicting botanical species: Apple, Orange, Banana, Mango (90.0% validation accuracy).</a:t>
             </a:r>
           </a:p>
           <a:p>
             <a:pPr>
               <a:spcBef>
-                <a:spcPts val="200"/>
+                <a:spcPts val="600"/>
               </a:spcBef>
-              <a:defRPr sz="1300">
-                <a:solidFill>
-                  <a:srgbClr val="475569"/>
-                </a:solidFill>
-              </a:defRPr>
             </a:pPr>
             <a:r>
-              <a:t>Achieve high validation precision across diverse real-world operating distributions.</a:t>
+              <a:rPr b="1">
+                <a:solidFill>
+                  <a:srgbClr val="10B981"/>
+                </a:solidFill>
+              </a:rPr>
+              <a:t>• </a:t>
+            </a:r>
+            <a:r>
+              <a:rPr b="1" sz="1100">
+                <a:solidFill>
+                  <a:srgbClr val="1E293B"/>
+                </a:solidFill>
+              </a:rPr>
+              <a:t>Grade Head: </a:t>
+            </a:r>
+            <a:r>
+              <a:rPr sz="1100">
+                <a:solidFill>
+                  <a:srgbClr val="64748B"/>
+                </a:solidFill>
+              </a:rPr>
+              <a:t>Linear(128, 3) classifying market tiers: Grade A Premium, Grade B Standard, Grade C Reject (100.0% validation accuracy).</a:t>
             </a:r>
           </a:p>
           <a:p>
             <a:pPr>
               <a:spcBef>
-                <a:spcPts val="800"/>
+                <a:spcPts val="600"/>
               </a:spcBef>
-              <a:defRPr sz="1600" b="1">
-                <a:solidFill>
-                  <a:srgbClr val="10B981"/>
-                </a:solidFill>
-              </a:defRPr>
             </a:pPr>
             <a:r>
-              <a:t>✓ Real-Time Low Latency Inference</a:t>
+              <a:rPr b="1">
+                <a:solidFill>
+                  <a:srgbClr val="10B981"/>
+                </a:solidFill>
+              </a:rPr>
+              <a:t>• </a:t>
+            </a:r>
+            <a:r>
+              <a:rPr b="1" sz="1100">
+                <a:solidFill>
+                  <a:srgbClr val="1E293B"/>
+                </a:solidFill>
+              </a:rPr>
+              <a:t>Defect Head: </a:t>
+            </a:r>
+            <a:r>
+              <a:rPr sz="1100">
+                <a:solidFill>
+                  <a:srgbClr val="64748B"/>
+                </a:solidFill>
+              </a:rPr>
+              <a:t>Linear(128, 5) identifying pathological lesions: None, Bruise, Skin Rot, Fungal Spot, Scab.</a:t>
+            </a:r>
+          </a:p>
+        </p:txBody>
+      </p:sp>
+      <p:sp>
+        <p:nvSpPr>
+          <p:cNvPr id="7" name="Rectangle 6"/>
+          <p:cNvSpPr/>
+          <p:nvPr/>
+        </p:nvSpPr>
+        <p:spPr>
+          <a:xfrm>
+            <a:off x="8046720" y="1371600"/>
+            <a:ext cx="3383280" cy="4937760"/>
+          </a:xfrm>
+          <a:prstGeom prst="rect">
+            <a:avLst/>
+          </a:prstGeom>
+          <a:solidFill>
+            <a:srgbClr val="FFFFFF"/>
+          </a:solidFill>
+          <a:ln w="12700">
+            <a:solidFill>
+              <a:srgbClr val="E2E8F0"/>
+            </a:solidFill>
+          </a:ln>
+        </p:spPr>
+        <p:style>
+          <a:lnRef idx="1">
+            <a:schemeClr val="accent1"/>
+          </a:lnRef>
+          <a:fillRef idx="3">
+            <a:schemeClr val="accent1"/>
+          </a:fillRef>
+          <a:effectRef idx="2">
+            <a:schemeClr val="accent1"/>
+          </a:effectRef>
+          <a:fontRef idx="minor">
+            <a:schemeClr val="lt1"/>
+          </a:fontRef>
+        </p:style>
+        <p:txBody>
+          <a:bodyPr rtlCol="0" anchor="ctr"/>
+          <a:lstStyle/>
+          <a:p>
+            <a:pPr algn="ctr"/>
+          </a:p>
+        </p:txBody>
+      </p:sp>
+      <p:sp>
+        <p:nvSpPr>
+          <p:cNvPr id="8" name="TextBox 7"/>
+          <p:cNvSpPr txBox="1"/>
+          <p:nvPr/>
+        </p:nvSpPr>
+        <p:spPr>
+          <a:xfrm>
+            <a:off x="8229600" y="1554480"/>
+            <a:ext cx="3017520" cy="4572000"/>
+          </a:xfrm>
+          <a:prstGeom prst="rect">
+            <a:avLst/>
+          </a:prstGeom>
+          <a:noFill/>
+        </p:spPr>
+        <p:txBody>
+          <a:bodyPr wrap="square" lIns="0" tIns="0" rIns="0" bIns="0">
+            <a:spAutoFit/>
+          </a:bodyPr>
+          <a:lstStyle/>
+          <a:p>
+            <a:r>
+              <a:rPr b="1" sz="1400">
+                <a:solidFill>
+                  <a:srgbClr val="0F172A"/>
+                </a:solidFill>
+              </a:rPr>
+              <a:t>Pneumatic Sorting Decision</a:t>
             </a:r>
           </a:p>
           <a:p>
             <a:pPr>
               <a:spcBef>
-                <a:spcPts val="200"/>
+                <a:spcPts val="600"/>
               </a:spcBef>
-              <a:defRPr sz="1300">
-                <a:solidFill>
-                  <a:srgbClr val="475569"/>
-                </a:solidFill>
-              </a:defRPr>
             </a:pPr>
             <a:r>
-              <a:t>Deliver end-to-end processing response times under 35 milliseconds per query.</a:t>
+              <a:rPr b="1">
+                <a:solidFill>
+                  <a:srgbClr val="10B981"/>
+                </a:solidFill>
+              </a:rPr>
+              <a:t>• </a:t>
+            </a:r>
+            <a:r>
+              <a:rPr b="1" sz="1100">
+                <a:solidFill>
+                  <a:srgbClr val="1E293B"/>
+                </a:solidFill>
+              </a:rPr>
+              <a:t>Actuator Routing Logic: </a:t>
+            </a:r>
+            <a:r>
+              <a:rPr sz="1100">
+                <a:solidFill>
+                  <a:srgbClr val="64748B"/>
+                </a:solidFill>
+              </a:rPr>
+              <a:t>Grade A routed to Bin 1 (Export), Grade B to Bin 2 (Domestic), and Grade C to Bin 3 (Discard/Processing).</a:t>
             </a:r>
           </a:p>
           <a:p>
             <a:pPr>
               <a:spcBef>
-                <a:spcPts val="800"/>
+                <a:spcPts val="600"/>
               </a:spcBef>
-              <a:defRPr sz="1600" b="1">
-                <a:solidFill>
-                  <a:srgbClr val="10B981"/>
-                </a:solidFill>
-              </a:defRPr>
             </a:pPr>
             <a:r>
-              <a:t>✓ Robust Anomaly &amp; Boundary Handling</a:t>
+              <a:rPr b="1">
+                <a:solidFill>
+                  <a:srgbClr val="10B981"/>
+                </a:solidFill>
+              </a:rPr>
+              <a:t>• </a:t>
+            </a:r>
+            <a:r>
+              <a:rPr b="1" sz="1100">
+                <a:solidFill>
+                  <a:srgbClr val="1E293B"/>
+                </a:solidFill>
+              </a:rPr>
+              <a:t>Ultra-Lean Serialization: </a:t>
+            </a:r>
+            <a:r>
+              <a:rPr sz="1100">
+                <a:solidFill>
+                  <a:srgbClr val="64748B"/>
+                </a:solidFill>
+              </a:rPr>
+              <a:t>Fully trained PyTorch model serialized at 391 KB, ideal for low-cost embedded packhouse controllers.</a:t>
             </a:r>
           </a:p>
           <a:p>
             <a:pPr>
               <a:spcBef>
-                <a:spcPts val="200"/>
+                <a:spcPts val="600"/>
               </a:spcBef>
-              <a:defRPr sz="1300">
-                <a:solidFill>
-                  <a:srgbClr val="475569"/>
-                </a:solidFill>
-              </a:defRPr>
             </a:pPr>
             <a:r>
-              <a:t>Detect out-of-distribution instances and reject anomalous inputs with deterministic alerts.</a:t>
-            </a:r>
-          </a:p>
-          <a:p>
-            <a:pPr>
-              <a:spcBef>
-                <a:spcPts val="800"/>
-              </a:spcBef>
-              <a:defRPr sz="1600" b="1">
-                <a:solidFill>
-                  <a:srgbClr val="10B981"/>
-                </a:solidFill>
-              </a:defRPr>
-            </a:pPr>
-            <a:r>
-              <a:t>✓ Production-Ready Full Stack</a:t>
-            </a:r>
-          </a:p>
-          <a:p>
-            <a:pPr>
-              <a:spcBef>
-                <a:spcPts val="200"/>
-              </a:spcBef>
-              <a:defRPr sz="1300">
-                <a:solidFill>
-                  <a:srgbClr val="475569"/>
-                </a:solidFill>
-              </a:defRPr>
-            </a:pPr>
-            <a:r>
-              <a:t>Provide modular REST APIs, audit logging, and responsive user interfaces.</a:t>
+              <a:rPr b="1">
+                <a:solidFill>
+                  <a:srgbClr val="10B981"/>
+                </a:solidFill>
+              </a:rPr>
+              <a:t>• </a:t>
+            </a:r>
+            <a:r>
+              <a:rPr b="1" sz="1100">
+                <a:solidFill>
+                  <a:srgbClr val="1E293B"/>
+                </a:solidFill>
+              </a:rPr>
+              <a:t>End-to-End Latency: </a:t>
+            </a:r>
+            <a:r>
+              <a:rPr sz="1100">
+                <a:solidFill>
+                  <a:srgbClr val="64748B"/>
+                </a:solidFill>
+              </a:rPr>
+              <a:t>14.8 ms mean inference speed, supporting throughputs up to 140 fruit inspections per minute.</a:t>
             </a:r>
           </a:p>
         </p:txBody>
@@ -3688,23 +6524,68 @@
       <p:grpSpPr/>
       <p:sp>
         <p:nvSpPr>
-          <p:cNvPr id="2" name="Rectangle 1"/>
+          <p:cNvPr id="2" name="TextBox 1"/>
+          <p:cNvSpPr txBox="1"/>
+          <p:nvPr/>
+        </p:nvSpPr>
+        <p:spPr>
+          <a:xfrm>
+            <a:off x="731520" y="365760"/>
+            <a:ext cx="10728655" cy="822960"/>
+          </a:xfrm>
+          <a:prstGeom prst="rect">
+            <a:avLst/>
+          </a:prstGeom>
+          <a:noFill/>
+        </p:spPr>
+        <p:txBody>
+          <a:bodyPr wrap="square" lIns="0" tIns="0" rIns="0" bIns="0">
+            <a:spAutoFit/>
+          </a:bodyPr>
+          <a:lstStyle/>
+          <a:p>
+            <a:r>
+              <a:rPr b="1" sz="1000">
+                <a:solidFill>
+                  <a:srgbClr val="10B981"/>
+                </a:solidFill>
+              </a:rPr>
+              <a:t>QUANTITATIVE AGRONOMY • PROJECT-041</a:t>
+            </a:r>
+          </a:p>
+          <a:p>
+            <a:r>
+              <a:rPr b="1" sz="2000">
+                <a:solidFill>
+                  <a:srgbClr val="0F172A"/>
+                </a:solidFill>
+              </a:rPr>
+              <a:t>Neural Freshness &amp; Shelf-Life Regression Modeling</a:t>
+            </a:r>
+          </a:p>
+        </p:txBody>
+      </p:sp>
+      <p:sp>
+        <p:nvSpPr>
+          <p:cNvPr id="3" name="Rectangle 2"/>
           <p:cNvSpPr/>
           <p:nvPr/>
         </p:nvSpPr>
         <p:spPr>
           <a:xfrm>
-            <a:off x="0" y="0"/>
-            <a:ext cx="12191695" cy="1097280"/>
+            <a:off x="731520" y="1371600"/>
+            <a:ext cx="5120640" cy="4937760"/>
           </a:xfrm>
           <a:prstGeom prst="rect">
             <a:avLst/>
           </a:prstGeom>
           <a:solidFill>
-            <a:srgbClr val="0F172A"/>
+            <a:srgbClr val="FFFFFF"/>
           </a:solidFill>
-          <a:ln>
-            <a:noFill/>
+          <a:ln w="12700">
+            <a:solidFill>
+              <a:srgbClr val="E2E8F0"/>
+            </a:solidFill>
           </a:ln>
         </p:spPr>
         <p:style>
@@ -3731,14 +6612,14 @@
       </p:sp>
       <p:sp>
         <p:nvSpPr>
-          <p:cNvPr id="3" name="TextBox 2"/>
+          <p:cNvPr id="4" name="TextBox 3"/>
           <p:cNvSpPr txBox="1"/>
           <p:nvPr/>
         </p:nvSpPr>
         <p:spPr>
           <a:xfrm>
-            <a:off x="731520" y="137160"/>
-            <a:ext cx="10698480" cy="822960"/>
+            <a:off x="914400" y="1554480"/>
+            <a:ext cx="4754880" cy="4572000"/>
           </a:xfrm>
           <a:prstGeom prst="rect">
             <a:avLst/>
@@ -3746,46 +6627,201 @@
           <a:noFill/>
         </p:spPr>
         <p:txBody>
-          <a:bodyPr wrap="square">
+          <a:bodyPr wrap="square" lIns="0" tIns="0" rIns="0" bIns="0">
             <a:spAutoFit/>
           </a:bodyPr>
           <a:lstStyle/>
           <a:p>
+            <a:r>
+              <a:rPr b="1" sz="1400">
+                <a:solidFill>
+                  <a:srgbClr val="0F172A"/>
+                </a:solidFill>
+              </a:rPr>
+              <a:t>Physical Telemetry Feature Space</a:t>
+            </a:r>
+          </a:p>
+          <a:p>
             <a:pPr>
-              <a:defRPr sz="2400" b="1">
-                <a:solidFill>
-                  <a:srgbClr val="FFFFFF"/>
-                </a:solidFill>
-              </a:defRPr>
+              <a:spcBef>
+                <a:spcPts val="600"/>
+              </a:spcBef>
             </a:pPr>
             <a:r>
-              <a:t>3. System Architecture &amp; Workflow Pipeline</a:t>
+              <a:rPr b="1">
+                <a:solidFill>
+                  <a:srgbClr val="10B981"/>
+                </a:solidFill>
+              </a:rPr>
+              <a:t>• </a:t>
+            </a:r>
+            <a:r>
+              <a:rPr b="1" sz="1100">
+                <a:solidFill>
+                  <a:srgbClr val="1E293B"/>
+                </a:solidFill>
+              </a:rPr>
+              <a:t>Morphological Attributes: </a:t>
+            </a:r>
+            <a:r>
+              <a:rPr sz="1100">
+                <a:solidFill>
+                  <a:srgbClr val="64748B"/>
+                </a:solidFill>
+              </a:rPr>
+              <a:t>Fruit mass (weight in grams) and equatorial diameter (mm) extracted via laser profile scanning.</a:t>
             </a:r>
           </a:p>
           <a:p>
             <a:pPr>
-              <a:defRPr sz="1100">
-                <a:solidFill>
-                  <a:srgbClr val="94A3B8"/>
-                </a:solidFill>
-              </a:defRPr>
+              <a:spcBef>
+                <a:spcPts val="600"/>
+              </a:spcBef>
             </a:pPr>
             <a:r>
-              <a:t>Academic &amp; Industrial AI Project Series  |  Project 41 of 55</a:t>
-            </a:r>
-          </a:p>
-        </p:txBody>
-      </p:sp>
-      <p:sp>
-        <p:nvSpPr>
-          <p:cNvPr id="4" name="TextBox 3"/>
+              <a:rPr b="1">
+                <a:solidFill>
+                  <a:srgbClr val="10B981"/>
+                </a:solidFill>
+              </a:rPr>
+              <a:t>• </a:t>
+            </a:r>
+            <a:r>
+              <a:rPr b="1" sz="1100">
+                <a:solidFill>
+                  <a:srgbClr val="1E293B"/>
+                </a:solidFill>
+              </a:rPr>
+              <a:t>Surface Chromatic Vectors: </a:t>
+            </a:r>
+            <a:r>
+              <a:rPr sz="1100">
+                <a:solidFill>
+                  <a:srgbClr val="64748B"/>
+                </a:solidFill>
+              </a:rPr>
+              <a:t>Mean chromaticity coordinates (R, G, B) and spectral skin reflectance index capturing chlorophyll degradation.</a:t>
+            </a:r>
+          </a:p>
+          <a:p>
+            <a:pPr>
+              <a:spcBef>
+                <a:spcPts val="600"/>
+              </a:spcBef>
+            </a:pPr>
+            <a:r>
+              <a:rPr b="1">
+                <a:solidFill>
+                  <a:srgbClr val="10B981"/>
+                </a:solidFill>
+              </a:rPr>
+              <a:t>• </a:t>
+            </a:r>
+            <a:r>
+              <a:rPr b="1" sz="1100">
+                <a:solidFill>
+                  <a:srgbClr val="1E293B"/>
+                </a:solidFill>
+              </a:rPr>
+              <a:t>Lesion Geometry Ratio: </a:t>
+            </a:r>
+            <a:r>
+              <a:rPr sz="1100">
+                <a:solidFill>
+                  <a:srgbClr val="64748B"/>
+                </a:solidFill>
+              </a:rPr>
+              <a:t>Ratio of segmented surface defect area to total fruit projection area (defect_ratio in [0.0, 0.35]).</a:t>
+            </a:r>
+          </a:p>
+          <a:p>
+            <a:pPr>
+              <a:spcBef>
+                <a:spcPts val="600"/>
+              </a:spcBef>
+            </a:pPr>
+            <a:r>
+              <a:rPr b="1">
+                <a:solidFill>
+                  <a:srgbClr val="10B981"/>
+                </a:solidFill>
+              </a:rPr>
+              <a:t>• </a:t>
+            </a:r>
+            <a:r>
+              <a:rPr b="1" sz="1100">
+                <a:solidFill>
+                  <a:srgbClr val="1E293B"/>
+                </a:solidFill>
+              </a:rPr>
+              <a:t>Post-Harvest Storage State: </a:t>
+            </a:r>
+            <a:r>
+              <a:rPr sz="1100">
+                <a:solidFill>
+                  <a:srgbClr val="64748B"/>
+                </a:solidFill>
+              </a:rPr>
+              <a:t>Days elapsed since harvest, cold-chain temperature (1-12 C), and relative humidity (60-98%).</a:t>
+            </a:r>
+          </a:p>
+        </p:txBody>
+      </p:sp>
+      <p:sp>
+        <p:nvSpPr>
+          <p:cNvPr id="5" name="Rectangle 4"/>
+          <p:cNvSpPr/>
+          <p:nvPr/>
+        </p:nvSpPr>
+        <p:spPr>
+          <a:xfrm>
+            <a:off x="6217920" y="1371600"/>
+            <a:ext cx="5212080" cy="4937760"/>
+          </a:xfrm>
+          <a:prstGeom prst="rect">
+            <a:avLst/>
+          </a:prstGeom>
+          <a:solidFill>
+            <a:srgbClr val="FFFFFF"/>
+          </a:solidFill>
+          <a:ln w="12700">
+            <a:solidFill>
+              <a:srgbClr val="E2E8F0"/>
+            </a:solidFill>
+          </a:ln>
+        </p:spPr>
+        <p:style>
+          <a:lnRef idx="1">
+            <a:schemeClr val="accent1"/>
+          </a:lnRef>
+          <a:fillRef idx="3">
+            <a:schemeClr val="accent1"/>
+          </a:fillRef>
+          <a:effectRef idx="2">
+            <a:schemeClr val="accent1"/>
+          </a:effectRef>
+          <a:fontRef idx="minor">
+            <a:schemeClr val="lt1"/>
+          </a:fontRef>
+        </p:style>
+        <p:txBody>
+          <a:bodyPr rtlCol="0" anchor="ctr"/>
+          <a:lstStyle/>
+          <a:p>
+            <a:pPr algn="ctr"/>
+          </a:p>
+        </p:txBody>
+      </p:sp>
+      <p:sp>
+        <p:nvSpPr>
+          <p:cNvPr id="6" name="TextBox 5"/>
           <p:cNvSpPr txBox="1"/>
           <p:nvPr/>
         </p:nvSpPr>
         <p:spPr>
           <a:xfrm>
-            <a:off x="731520" y="1371600"/>
-            <a:ext cx="10698480" cy="5029200"/>
+            <a:off x="6400800" y="1554480"/>
+            <a:ext cx="4846320" cy="4572000"/>
           </a:xfrm>
           <a:prstGeom prst="rect">
             <a:avLst/>
@@ -3793,143 +6829,142 @@
           <a:noFill/>
         </p:spPr>
         <p:txBody>
-          <a:bodyPr wrap="square">
+          <a:bodyPr wrap="square" lIns="0" tIns="0" rIns="0" bIns="0">
             <a:spAutoFit/>
           </a:bodyPr>
           <a:lstStyle/>
           <a:p>
+            <a:r>
+              <a:rPr b="1" sz="1400">
+                <a:solidFill>
+                  <a:srgbClr val="0F172A"/>
+                </a:solidFill>
+              </a:rPr>
+              <a:t>Multi-Target Freshness Heads</a:t>
+            </a:r>
+          </a:p>
+          <a:p>
             <a:pPr>
               <a:spcBef>
-                <a:spcPts val="800"/>
+                <a:spcPts val="600"/>
               </a:spcBef>
-              <a:defRPr sz="1500" b="1">
-                <a:solidFill>
-                  <a:srgbClr val="2563EB"/>
-                </a:solidFill>
-              </a:defRPr>
             </a:pPr>
             <a:r>
-              <a:t>[1] Ingestion Layer</a:t>
-            </a:r>
-          </a:p>
-          <a:p>
-            <a:pPr>
-              <a:defRPr sz="1300">
-                <a:solidFill>
-                  <a:srgbClr val="475569"/>
-                </a:solidFill>
-              </a:defRPr>
-            </a:pPr>
-            <a:r>
-              <a:t>Raw telemetry, video feeds, or structured tabular features ingested via secure endpoints.</a:t>
+              <a:rPr b="1">
+                <a:solidFill>
+                  <a:srgbClr val="10B981"/>
+                </a:solidFill>
+              </a:rPr>
+              <a:t>• </a:t>
+            </a:r>
+            <a:r>
+              <a:rPr b="1" sz="1100">
+                <a:solidFill>
+                  <a:srgbClr val="1E293B"/>
+                </a:solidFill>
+              </a:rPr>
+              <a:t>Flesh Penetrometer Firmness: </a:t>
+            </a:r>
+            <a:r>
+              <a:rPr sz="1100">
+                <a:solidFill>
+                  <a:srgbClr val="64748B"/>
+                </a:solidFill>
+              </a:rPr>
+              <a:t>Predicts Magness-Taylor puncture resistance [10.0, 95.0] N with validation MAE of 6.39 N.</a:t>
             </a:r>
           </a:p>
           <a:p>
             <a:pPr>
               <a:spcBef>
-                <a:spcPts val="800"/>
+                <a:spcPts val="600"/>
               </a:spcBef>
-              <a:defRPr sz="1500" b="1">
-                <a:solidFill>
-                  <a:srgbClr val="2563EB"/>
-                </a:solidFill>
-              </a:defRPr>
             </a:pPr>
             <a:r>
-              <a:t>[2] Preprocessing &amp; Normalization</a:t>
-            </a:r>
-          </a:p>
-          <a:p>
-            <a:pPr>
-              <a:defRPr sz="1300">
-                <a:solidFill>
-                  <a:srgbClr val="475569"/>
-                </a:solidFill>
-              </a:defRPr>
-            </a:pPr>
-            <a:r>
-              <a:t>Feature scaling, missing value imputation, winsorization, and tensor reshaping.</a:t>
+              <a:rPr b="1">
+                <a:solidFill>
+                  <a:srgbClr val="10B981"/>
+                </a:solidFill>
+              </a:rPr>
+              <a:t>• </a:t>
+            </a:r>
+            <a:r>
+              <a:rPr b="1" sz="1100">
+                <a:solidFill>
+                  <a:srgbClr val="1E293B"/>
+                </a:solidFill>
+              </a:rPr>
+              <a:t>Sugar Content (Brix %): </a:t>
+            </a:r>
+            <a:r>
+              <a:rPr sz="1100">
+                <a:solidFill>
+                  <a:srgbClr val="64748B"/>
+                </a:solidFill>
+              </a:rPr>
+              <a:t>Predicts refractometric total soluble solids [7.0, 22.0] Brix % with validation MAE of 1.23 Brix %.</a:t>
             </a:r>
           </a:p>
           <a:p>
             <a:pPr>
               <a:spcBef>
-                <a:spcPts val="800"/>
+                <a:spcPts val="600"/>
               </a:spcBef>
-              <a:defRPr sz="1500" b="1">
-                <a:solidFill>
-                  <a:srgbClr val="2563EB"/>
-                </a:solidFill>
-              </a:defRPr>
             </a:pPr>
             <a:r>
-              <a:t>[3] Deep Neural Inference Engine</a:t>
-            </a:r>
-          </a:p>
-          <a:p>
-            <a:pPr>
-              <a:defRPr sz="1300">
-                <a:solidFill>
-                  <a:srgbClr val="475569"/>
-                </a:solidFill>
-              </a:defRPr>
-            </a:pPr>
-            <a:r>
-              <a:t>Optimized model evaluating representations with GPU/MPS/CPU acceleration.</a:t>
+              <a:rPr b="1">
+                <a:solidFill>
+                  <a:srgbClr val="10B981"/>
+                </a:solidFill>
+              </a:rPr>
+              <a:t>• </a:t>
+            </a:r>
+            <a:r>
+              <a:rPr b="1" sz="1100">
+                <a:solidFill>
+                  <a:srgbClr val="1E293B"/>
+                </a:solidFill>
+              </a:rPr>
+              <a:t>Marketable Shelf Life: </a:t>
+            </a:r>
+            <a:r>
+              <a:rPr sz="1100">
+                <a:solidFill>
+                  <a:srgbClr val="64748B"/>
+                </a:solidFill>
+              </a:rPr>
+              <a:t>Predicts remaining commercial storage longevity [0.5, 30.0] Days with validation MAE of 2.11 Days.</a:t>
             </a:r>
           </a:p>
           <a:p>
             <a:pPr>
               <a:spcBef>
-                <a:spcPts val="800"/>
+                <a:spcPts val="600"/>
               </a:spcBef>
-              <a:defRPr sz="1500" b="1">
-                <a:solidFill>
-                  <a:srgbClr val="2563EB"/>
-                </a:solidFill>
-              </a:defRPr>
             </a:pPr>
             <a:r>
-              <a:t>[4] Post-Processing &amp; Decision Support</a:t>
-            </a:r>
-          </a:p>
-          <a:p>
-            <a:pPr>
-              <a:defRPr sz="1300">
-                <a:solidFill>
-                  <a:srgbClr val="475569"/>
-                </a:solidFill>
-              </a:defRPr>
-            </a:pPr>
-            <a:r>
-              <a:t>Threshold calibration, confidence scoring, classification/regression output formatting.</a:t>
-            </a:r>
-          </a:p>
-          <a:p>
-            <a:pPr>
-              <a:spcBef>
-                <a:spcPts val="800"/>
-              </a:spcBef>
-              <a:defRPr sz="1500" b="1">
-                <a:solidFill>
-                  <a:srgbClr val="2563EB"/>
-                </a:solidFill>
-              </a:defRPr>
-            </a:pPr>
-            <a:r>
-              <a:t>[5] Visualization &amp; Persistence</a:t>
-            </a:r>
-          </a:p>
-          <a:p>
-            <a:pPr>
-              <a:defRPr sz="1300">
-                <a:solidFill>
-                  <a:srgbClr val="475569"/>
-                </a:solidFill>
-              </a:defRPr>
-            </a:pPr>
-            <a:r>
-              <a:t>Interactive UI dashboard rendering metrics and SQLite/PostgreSQL audit logging.</a:t>
+              <a:rPr b="1">
+                <a:solidFill>
+                  <a:srgbClr val="10B981"/>
+                </a:solidFill>
+              </a:rPr>
+              <a:t>• </a:t>
+            </a:r>
+            <a:r>
+              <a:rPr b="1" sz="1100">
+                <a:solidFill>
+                  <a:srgbClr val="1E293B"/>
+                </a:solidFill>
+              </a:rPr>
+              <a:t>Batch Economic Index: </a:t>
+            </a:r>
+            <a:r>
+              <a:rPr sz="1100">
+                <a:solidFill>
+                  <a:srgbClr val="64748B"/>
+                </a:solidFill>
+              </a:rPr>
+              <a:t>Normalized composite value score [0.0, 100.0] points driving dynamic commercial auction pricing.</a:t>
             </a:r>
           </a:p>
         </p:txBody>
@@ -3954,23 +6989,92 @@
       <p:grpSpPr/>
       <p:sp>
         <p:nvSpPr>
-          <p:cNvPr id="2" name="Rectangle 1"/>
+          <p:cNvPr id="2" name="TextBox 1"/>
+          <p:cNvSpPr txBox="1"/>
+          <p:nvPr/>
+        </p:nvSpPr>
+        <p:spPr>
+          <a:xfrm>
+            <a:off x="731520" y="365760"/>
+            <a:ext cx="10728655" cy="822960"/>
+          </a:xfrm>
+          <a:prstGeom prst="rect">
+            <a:avLst/>
+          </a:prstGeom>
+          <a:noFill/>
+        </p:spPr>
+        <p:txBody>
+          <a:bodyPr wrap="square" lIns="0" tIns="0" rIns="0" bIns="0">
+            <a:spAutoFit/>
+          </a:bodyPr>
+          <a:lstStyle/>
+          <a:p>
+            <a:r>
+              <a:rPr b="1" sz="1000">
+                <a:solidFill>
+                  <a:srgbClr val="10B981"/>
+                </a:solidFill>
+              </a:rPr>
+              <a:t>OPERATIONAL UI • PROJECT-041</a:t>
+            </a:r>
+          </a:p>
+          <a:p>
+            <a:r>
+              <a:rPr b="1" sz="2000">
+                <a:solidFill>
+                  <a:srgbClr val="0F172A"/>
+                </a:solidFill>
+              </a:rPr>
+              <a:t>High-Speed Sorter Command Dashboard</a:t>
+            </a:r>
+          </a:p>
+        </p:txBody>
+      </p:sp>
+      <p:pic>
+        <p:nvPicPr>
+          <p:cNvPr id="3" name="Picture 2" descr="01_command_dashboard.png"/>
+          <p:cNvPicPr>
+            <a:picLocks noChangeAspect="1"/>
+          </p:cNvPicPr>
+          <p:nvPr/>
+        </p:nvPicPr>
+        <p:blipFill>
+          <a:blip r:embed="rId2"/>
+          <a:stretch>
+            <a:fillRect/>
+          </a:stretch>
+        </p:blipFill>
+        <p:spPr>
+          <a:xfrm>
+            <a:off x="731520" y="1371600"/>
+            <a:ext cx="6583680" cy="4114800"/>
+          </a:xfrm>
+          <a:prstGeom prst="rect">
+            <a:avLst/>
+          </a:prstGeom>
+        </p:spPr>
+      </p:pic>
+      <p:sp>
+        <p:nvSpPr>
+          <p:cNvPr id="4" name="Rectangle 3"/>
           <p:cNvSpPr/>
           <p:nvPr/>
         </p:nvSpPr>
         <p:spPr>
           <a:xfrm>
-            <a:off x="0" y="0"/>
-            <a:ext cx="12191695" cy="1097280"/>
+            <a:off x="7589520" y="1371600"/>
+            <a:ext cx="3840480" cy="4937760"/>
           </a:xfrm>
           <a:prstGeom prst="rect">
             <a:avLst/>
           </a:prstGeom>
           <a:solidFill>
-            <a:srgbClr val="0F172A"/>
+            <a:srgbClr val="FFFFFF"/>
           </a:solidFill>
-          <a:ln>
-            <a:noFill/>
+          <a:ln w="12700">
+            <a:solidFill>
+              <a:srgbClr val="E2E8F0"/>
+            </a:solidFill>
           </a:ln>
         </p:spPr>
         <p:style>
@@ -3997,14 +7101,14 @@
       </p:sp>
       <p:sp>
         <p:nvSpPr>
-          <p:cNvPr id="3" name="TextBox 2"/>
+          <p:cNvPr id="5" name="TextBox 4"/>
           <p:cNvSpPr txBox="1"/>
           <p:nvPr/>
         </p:nvSpPr>
         <p:spPr>
           <a:xfrm>
-            <a:off x="731520" y="137160"/>
-            <a:ext cx="10698480" cy="822960"/>
+            <a:off x="7772400" y="1554480"/>
+            <a:ext cx="3474720" cy="4572000"/>
           </a:xfrm>
           <a:prstGeom prst="rect">
             <a:avLst/>
@@ -4012,163 +7116,142 @@
           <a:noFill/>
         </p:spPr>
         <p:txBody>
-          <a:bodyPr wrap="square">
+          <a:bodyPr wrap="square" lIns="0" tIns="0" rIns="0" bIns="0">
             <a:spAutoFit/>
           </a:bodyPr>
           <a:lstStyle/>
           <a:p>
-            <a:pPr>
-              <a:defRPr sz="2400" b="1">
-                <a:solidFill>
-                  <a:srgbClr val="FFFFFF"/>
-                </a:solidFill>
-              </a:defRPr>
-            </a:pPr>
-            <a:r>
-              <a:t>4. Deep Learning &amp; ML Methodology</a:t>
-            </a:r>
-          </a:p>
-          <a:p>
-            <a:pPr>
-              <a:defRPr sz="1100">
-                <a:solidFill>
-                  <a:srgbClr val="94A3B8"/>
-                </a:solidFill>
-              </a:defRPr>
-            </a:pPr>
-            <a:r>
-              <a:t>Academic &amp; Industrial AI Project Series  |  Project 41 of 55</a:t>
-            </a:r>
-          </a:p>
-        </p:txBody>
-      </p:sp>
-      <p:sp>
-        <p:nvSpPr>
-          <p:cNvPr id="4" name="TextBox 3"/>
-          <p:cNvSpPr txBox="1"/>
-          <p:nvPr/>
-        </p:nvSpPr>
-        <p:spPr>
-          <a:xfrm>
-            <a:off x="731520" y="1371600"/>
-            <a:ext cx="10698480" cy="5029200"/>
-          </a:xfrm>
-          <a:prstGeom prst="rect">
-            <a:avLst/>
-          </a:prstGeom>
-          <a:noFill/>
-        </p:spPr>
-        <p:txBody>
-          <a:bodyPr wrap="square">
-            <a:spAutoFit/>
-          </a:bodyPr>
-          <a:lstStyle/>
+            <a:r>
+              <a:rPr b="1" sz="1400">
+                <a:solidFill>
+                  <a:srgbClr val="0F172A"/>
+                </a:solidFill>
+              </a:rPr>
+              <a:t>Central Control HUD</a:t>
+            </a:r>
+          </a:p>
           <a:p>
             <a:pPr>
               <a:spcBef>
-                <a:spcPts val="800"/>
+                <a:spcPts val="600"/>
               </a:spcBef>
-              <a:defRPr sz="1500" b="1">
-                <a:solidFill>
-                  <a:srgbClr val="0F172A"/>
-                </a:solidFill>
-              </a:defRPr>
             </a:pPr>
             <a:r>
-              <a:t>• Feature Engineering &amp; Dimensionality Alignment</a:t>
-            </a:r>
-          </a:p>
-          <a:p>
-            <a:pPr>
-              <a:defRPr sz="1300">
-                <a:solidFill>
-                  <a:srgbClr val="475569"/>
-                </a:solidFill>
-              </a:defRPr>
-            </a:pPr>
-            <a:r>
-              <a:t>Domain-specific feature extraction, temporal windowing, and embedding vectors.</a:t>
+              <a:rPr b="1">
+                <a:solidFill>
+                  <a:srgbClr val="10B981"/>
+                </a:solidFill>
+              </a:rPr>
+              <a:t>• </a:t>
+            </a:r>
+            <a:r>
+              <a:rPr b="1" sz="1100">
+                <a:solidFill>
+                  <a:srgbClr val="1E293B"/>
+                </a:solidFill>
+              </a:rPr>
+              <a:t>Dedicated Port 5041: </a:t>
+            </a:r>
+            <a:r>
+              <a:rPr sz="1100">
+                <a:solidFill>
+                  <a:srgbClr val="64748B"/>
+                </a:solidFill>
+              </a:rPr>
+              <a:t>Operating as an asynchronous FastAPI microservice with high-performance responsive frontend.</a:t>
             </a:r>
           </a:p>
           <a:p>
             <a:pPr>
               <a:spcBef>
-                <a:spcPts val="800"/>
+                <a:spcPts val="600"/>
               </a:spcBef>
-              <a:defRPr sz="1500" b="1">
-                <a:solidFill>
-                  <a:srgbClr val="0F172A"/>
-                </a:solidFill>
-              </a:defRPr>
             </a:pPr>
             <a:r>
-              <a:t>• Model Family &amp; Optimization</a:t>
-            </a:r>
-          </a:p>
-          <a:p>
-            <a:pPr>
-              <a:defRPr sz="1300">
-                <a:solidFill>
-                  <a:srgbClr val="475569"/>
-                </a:solidFill>
-              </a:defRPr>
-            </a:pPr>
-            <a:r>
-              <a:t>Ensemble gradient boosting or deep neural networks trained with AdamW and adaptive LR scheduling.</a:t>
+              <a:rPr b="1">
+                <a:solidFill>
+                  <a:srgbClr val="10B981"/>
+                </a:solidFill>
+              </a:rPr>
+              <a:t>• </a:t>
+            </a:r>
+            <a:r>
+              <a:rPr b="1" sz="1100">
+                <a:solidFill>
+                  <a:srgbClr val="1E293B"/>
+                </a:solidFill>
+              </a:rPr>
+              <a:t>Conveyor Telemetry Strip: </a:t>
+            </a:r>
+            <a:r>
+              <a:rPr sz="1100">
+                <a:solidFill>
+                  <a:srgbClr val="64748B"/>
+                </a:solidFill>
+              </a:rPr>
+              <a:t>Instant readout of total sorted items (6,000+), export grade yield (62.5%), and pneumatic latency.</a:t>
             </a:r>
           </a:p>
           <a:p>
             <a:pPr>
               <a:spcBef>
-                <a:spcPts val="800"/>
+                <a:spcPts val="600"/>
               </a:spcBef>
-              <a:defRPr sz="1500" b="1">
-                <a:solidFill>
-                  <a:srgbClr val="0F172A"/>
-                </a:solidFill>
-              </a:defRPr>
             </a:pPr>
             <a:r>
-              <a:t>• Overfitting Mitigation</a:t>
-            </a:r>
-          </a:p>
-          <a:p>
-            <a:pPr>
-              <a:defRPr sz="1300">
-                <a:solidFill>
-                  <a:srgbClr val="475569"/>
-                </a:solidFill>
-              </a:defRPr>
-            </a:pPr>
-            <a:r>
-              <a:t>Stratified k-fold cross-validation, dropout layers, early stopping, and data augmentation.</a:t>
+              <a:rPr b="1">
+                <a:solidFill>
+                  <a:srgbClr val="10B981"/>
+                </a:solidFill>
+              </a:rPr>
+              <a:t>• </a:t>
+            </a:r>
+            <a:r>
+              <a:rPr b="1" sz="1100">
+                <a:solidFill>
+                  <a:srgbClr val="1E293B"/>
+                </a:solidFill>
+              </a:rPr>
+              <a:t>Multi-Lane Dispatcher: </a:t>
+            </a:r>
+            <a:r>
+              <a:rPr sz="1100">
+                <a:solidFill>
+                  <a:srgbClr val="64748B"/>
+                </a:solidFill>
+              </a:rPr>
+              <a:t>One-click switching across 4 active conveyor belts (Apple, Orange, Banana, Mango lines).</a:t>
             </a:r>
           </a:p>
           <a:p>
             <a:pPr>
               <a:spcBef>
-                <a:spcPts val="800"/>
+                <a:spcPts val="600"/>
               </a:spcBef>
-              <a:defRPr sz="1500" b="1">
-                <a:solidFill>
-                  <a:srgbClr val="0F172A"/>
-                </a:solidFill>
-              </a:defRPr>
             </a:pPr>
             <a:r>
-              <a:t>• Explainability &amp; Auditability</a:t>
-            </a:r>
-          </a:p>
-          <a:p>
-            <a:pPr>
-              <a:defRPr sz="1300">
-                <a:solidFill>
-                  <a:srgbClr val="475569"/>
-                </a:solidFill>
-              </a:defRPr>
-            </a:pPr>
-            <a:r>
-              <a:t>Confidence scores and feature importance attributions for high-stakes decisions.</a:t>
+              <a:rPr b="1">
+                <a:solidFill>
+                  <a:srgbClr val="10B981"/>
+                </a:solidFill>
+              </a:rPr>
+              <a:t>• </a:t>
+            </a:r>
+            <a:r>
+              <a:rPr b="1" sz="1100">
+                <a:solidFill>
+                  <a:srgbClr val="1E293B"/>
+                </a:solidFill>
+              </a:rPr>
+              <a:t>Hardware Acceleration: </a:t>
+            </a:r>
+            <a:r>
+              <a:rPr sz="1100">
+                <a:solidFill>
+                  <a:srgbClr val="64748B"/>
+                </a:solidFill>
+              </a:rPr>
+              <a:t>Active Apple Metal Performance Shaders (MPS) device providing sub-15ms processing rate.</a:t>
             </a:r>
           </a:p>
         </p:txBody>
@@ -4193,23 +7276,92 @@
       <p:grpSpPr/>
       <p:sp>
         <p:nvSpPr>
-          <p:cNvPr id="2" name="Rectangle 1"/>
+          <p:cNvPr id="2" name="TextBox 1"/>
+          <p:cNvSpPr txBox="1"/>
+          <p:nvPr/>
+        </p:nvSpPr>
+        <p:spPr>
+          <a:xfrm>
+            <a:off x="731520" y="365760"/>
+            <a:ext cx="10728655" cy="822960"/>
+          </a:xfrm>
+          <a:prstGeom prst="rect">
+            <a:avLst/>
+          </a:prstGeom>
+          <a:noFill/>
+        </p:spPr>
+        <p:txBody>
+          <a:bodyPr wrap="square" lIns="0" tIns="0" rIns="0" bIns="0">
+            <a:spAutoFit/>
+          </a:bodyPr>
+          <a:lstStyle/>
+          <a:p>
+            <a:r>
+              <a:rPr b="1" sz="1000">
+                <a:solidFill>
+                  <a:srgbClr val="10B981"/>
+                </a:solidFill>
+              </a:rPr>
+              <a:t>REAL-TIME SIMULATION • PROJECT-041</a:t>
+            </a:r>
+          </a:p>
+          <a:p>
+            <a:r>
+              <a:rPr b="1" sz="2000">
+                <a:solidFill>
+                  <a:srgbClr val="0F172A"/>
+                </a:solidFill>
+              </a:rPr>
+              <a:t>60 FPS Conveyor Belt &amp; Optical Scanning Tunnel</a:t>
+            </a:r>
+          </a:p>
+        </p:txBody>
+      </p:sp>
+      <p:pic>
+        <p:nvPicPr>
+          <p:cNvPr id="3" name="Picture 2" descr="02_optical_conveyor_tunnel_canvas.png"/>
+          <p:cNvPicPr>
+            <a:picLocks noChangeAspect="1"/>
+          </p:cNvPicPr>
+          <p:nvPr/>
+        </p:nvPicPr>
+        <p:blipFill>
+          <a:blip r:embed="rId2"/>
+          <a:stretch>
+            <a:fillRect/>
+          </a:stretch>
+        </p:blipFill>
+        <p:spPr>
+          <a:xfrm>
+            <a:off x="731520" y="1371600"/>
+            <a:ext cx="6583680" cy="4114800"/>
+          </a:xfrm>
+          <a:prstGeom prst="rect">
+            <a:avLst/>
+          </a:prstGeom>
+        </p:spPr>
+      </p:pic>
+      <p:sp>
+        <p:nvSpPr>
+          <p:cNvPr id="4" name="Rectangle 3"/>
           <p:cNvSpPr/>
           <p:nvPr/>
         </p:nvSpPr>
         <p:spPr>
           <a:xfrm>
-            <a:off x="0" y="0"/>
-            <a:ext cx="12191695" cy="1097280"/>
+            <a:off x="7589520" y="1371600"/>
+            <a:ext cx="3840480" cy="4937760"/>
           </a:xfrm>
           <a:prstGeom prst="rect">
             <a:avLst/>
           </a:prstGeom>
           <a:solidFill>
-            <a:srgbClr val="0F172A"/>
+            <a:srgbClr val="FFFFFF"/>
           </a:solidFill>
-          <a:ln>
-            <a:noFill/>
+          <a:ln w="12700">
+            <a:solidFill>
+              <a:srgbClr val="E2E8F0"/>
+            </a:solidFill>
           </a:ln>
         </p:spPr>
         <p:style>
@@ -4236,14 +7388,14 @@
       </p:sp>
       <p:sp>
         <p:nvSpPr>
-          <p:cNvPr id="3" name="TextBox 2"/>
+          <p:cNvPr id="5" name="TextBox 4"/>
           <p:cNvSpPr txBox="1"/>
           <p:nvPr/>
         </p:nvSpPr>
         <p:spPr>
           <a:xfrm>
-            <a:off x="731520" y="137160"/>
-            <a:ext cx="10698480" cy="822960"/>
+            <a:off x="7772400" y="1554480"/>
+            <a:ext cx="3474720" cy="4572000"/>
           </a:xfrm>
           <a:prstGeom prst="rect">
             <a:avLst/>
@@ -4251,115 +7403,142 @@
           <a:noFill/>
         </p:spPr>
         <p:txBody>
-          <a:bodyPr wrap="square">
+          <a:bodyPr wrap="square" lIns="0" tIns="0" rIns="0" bIns="0">
             <a:spAutoFit/>
           </a:bodyPr>
           <a:lstStyle/>
           <a:p>
-            <a:pPr>
-              <a:defRPr sz="2400" b="1">
-                <a:solidFill>
-                  <a:srgbClr val="FFFFFF"/>
-                </a:solidFill>
-              </a:defRPr>
-            </a:pPr>
-            <a:r>
-              <a:t>5. Experimental Results &amp; Performance Benchmarks</a:t>
-            </a:r>
-          </a:p>
-          <a:p>
-            <a:pPr>
-              <a:defRPr sz="1100">
-                <a:solidFill>
-                  <a:srgbClr val="94A3B8"/>
-                </a:solidFill>
-              </a:defRPr>
-            </a:pPr>
-            <a:r>
-              <a:t>Academic &amp; Industrial AI Project Series  |  Project 41 of 55</a:t>
-            </a:r>
-          </a:p>
-        </p:txBody>
-      </p:sp>
-      <p:sp>
-        <p:nvSpPr>
-          <p:cNvPr id="4" name="TextBox 3"/>
-          <p:cNvSpPr txBox="1"/>
-          <p:nvPr/>
-        </p:nvSpPr>
-        <p:spPr>
-          <a:xfrm>
-            <a:off x="731520" y="1371600"/>
-            <a:ext cx="10698480" cy="5029200"/>
-          </a:xfrm>
-          <a:prstGeom prst="rect">
-            <a:avLst/>
-          </a:prstGeom>
-          <a:noFill/>
-        </p:spPr>
-        <p:txBody>
-          <a:bodyPr wrap="square">
-            <a:spAutoFit/>
-          </a:bodyPr>
-          <a:lstStyle/>
+            <a:r>
+              <a:rPr b="1" sz="1400">
+                <a:solidFill>
+                  <a:srgbClr val="0F172A"/>
+                </a:solidFill>
+              </a:rPr>
+              <a:t>Conveyor Simulation Features</a:t>
+            </a:r>
+          </a:p>
           <a:p>
             <a:pPr>
               <a:spcBef>
-                <a:spcPts val="1200"/>
+                <a:spcPts val="600"/>
               </a:spcBef>
-              <a:defRPr sz="1500" b="1">
-                <a:solidFill>
-                  <a:srgbClr val="10B981"/>
-                </a:solidFill>
-              </a:defRPr>
             </a:pPr>
             <a:r>
-              <a:t>★ Validation Accuracy / Score: Achieved 94.8% on independent validation test holdout partitions.</a:t>
+              <a:rPr b="1">
+                <a:solidFill>
+                  <a:srgbClr val="10B981"/>
+                </a:solidFill>
+              </a:rPr>
+              <a:t>• </a:t>
+            </a:r>
+            <a:r>
+              <a:rPr b="1" sz="1100">
+                <a:solidFill>
+                  <a:srgbClr val="1E293B"/>
+                </a:solidFill>
+              </a:rPr>
+              <a:t>Continuous Particle Motion: </a:t>
+            </a:r>
+            <a:r>
+              <a:rPr sz="1100">
+                <a:solidFill>
+                  <a:srgbClr val="64748B"/>
+                </a:solidFill>
+              </a:rPr>
+              <a:t>Real-time canvas simulation of fruits traveling along high-speed conveyor belts at 1.2 m/s.</a:t>
             </a:r>
           </a:p>
           <a:p>
             <a:pPr>
               <a:spcBef>
-                <a:spcPts val="1200"/>
+                <a:spcPts val="600"/>
               </a:spcBef>
-              <a:defRPr sz="1500" b="1">
-                <a:solidFill>
-                  <a:srgbClr val="10B981"/>
-                </a:solidFill>
-              </a:defRPr>
             </a:pPr>
             <a:r>
-              <a:t>★ F1-Score / Macro Precision: Balanced metric of 0.932 across positive and negative classification targets.</a:t>
+              <a:rPr b="1">
+                <a:solidFill>
+                  <a:srgbClr val="10B981"/>
+                </a:solidFill>
+              </a:rPr>
+              <a:t>• </a:t>
+            </a:r>
+            <a:r>
+              <a:rPr b="1" sz="1100">
+                <a:solidFill>
+                  <a:srgbClr val="1E293B"/>
+                </a:solidFill>
+              </a:rPr>
+              <a:t>Optical Laser Scanner Overlay: </a:t>
+            </a:r>
+            <a:r>
+              <a:rPr sz="1100">
+                <a:solidFill>
+                  <a:srgbClr val="64748B"/>
+                </a:solidFill>
+              </a:rPr>
+              <a:t>Laser projection line simulating multi-spectral industrial camera illumination.</a:t>
             </a:r>
           </a:p>
           <a:p>
             <a:pPr>
               <a:spcBef>
-                <a:spcPts val="1200"/>
+                <a:spcPts val="600"/>
               </a:spcBef>
-              <a:defRPr sz="1500" b="1">
-                <a:solidFill>
-                  <a:srgbClr val="10B981"/>
-                </a:solidFill>
-              </a:defRPr>
             </a:pPr>
             <a:r>
-              <a:t>★ Inference Latency Profile: Median latency of 18.4 ms per inference query on edge CPU hardware.</a:t>
+              <a:rPr b="1">
+                <a:solidFill>
+                  <a:srgbClr val="10B981"/>
+                </a:solidFill>
+              </a:rPr>
+              <a:t>• </a:t>
+            </a:r>
+            <a:r>
+              <a:rPr b="1" sz="1100">
+                <a:solidFill>
+                  <a:srgbClr val="1E293B"/>
+                </a:solidFill>
+              </a:rPr>
+              <a:t>Real-Time Bounding Overlay: </a:t>
+            </a:r>
+            <a:r>
+              <a:rPr sz="1100">
+                <a:solidFill>
+                  <a:srgbClr val="64748B"/>
+                </a:solidFill>
+              </a:rPr>
+              <a:t>Dynamic bounding boxes rendering variety classification and confidence percentage.</a:t>
             </a:r>
           </a:p>
           <a:p>
             <a:pPr>
               <a:spcBef>
-                <a:spcPts val="1200"/>
+                <a:spcPts val="600"/>
               </a:spcBef>
-              <a:defRPr sz="1500" b="1">
-                <a:solidFill>
-                  <a:srgbClr val="10B981"/>
-                </a:solidFill>
-              </a:defRPr>
             </a:pPr>
             <a:r>
-              <a:t>★ False Positive Rate (FPR): Maintained below 2.8%, satisfying stringent operational false alarm constraints.</a:t>
+              <a:rPr b="1">
+                <a:solidFill>
+                  <a:srgbClr val="10B981"/>
+                </a:solidFill>
+              </a:rPr>
+              <a:t>• </a:t>
+            </a:r>
+            <a:r>
+              <a:rPr b="1" sz="1100">
+                <a:solidFill>
+                  <a:srgbClr val="1E293B"/>
+                </a:solidFill>
+              </a:rPr>
+              <a:t>Pneumatic Diverter Arms: </a:t>
+            </a:r>
+            <a:r>
+              <a:rPr sz="1100">
+                <a:solidFill>
+                  <a:srgbClr val="64748B"/>
+                </a:solidFill>
+              </a:rPr>
+              <a:t>Visual representations of Bin 1 (Export) and Bin 2 (Domestic) pneumatic diversion gates.</a:t>
             </a:r>
           </a:p>
         </p:txBody>
@@ -4384,23 +7563,92 @@
       <p:grpSpPr/>
       <p:sp>
         <p:nvSpPr>
-          <p:cNvPr id="2" name="Rectangle 1"/>
+          <p:cNvPr id="2" name="TextBox 1"/>
+          <p:cNvSpPr txBox="1"/>
+          <p:nvPr/>
+        </p:nvSpPr>
+        <p:spPr>
+          <a:xfrm>
+            <a:off x="731520" y="365760"/>
+            <a:ext cx="10728655" cy="822960"/>
+          </a:xfrm>
+          <a:prstGeom prst="rect">
+            <a:avLst/>
+          </a:prstGeom>
+          <a:noFill/>
+        </p:spPr>
+        <p:txBody>
+          <a:bodyPr wrap="square" lIns="0" tIns="0" rIns="0" bIns="0">
+            <a:spAutoFit/>
+          </a:bodyPr>
+          <a:lstStyle/>
+          <a:p>
+            <a:r>
+              <a:rPr b="1" sz="1000">
+                <a:solidFill>
+                  <a:srgbClr val="10B981"/>
+                </a:solidFill>
+              </a:rPr>
+              <a:t>QUALITY ANALYTICS • PROJECT-041</a:t>
+            </a:r>
+          </a:p>
+          <a:p>
+            <a:r>
+              <a:rPr b="1" sz="2000">
+                <a:solidFill>
+                  <a:srgbClr val="0F172A"/>
+                </a:solidFill>
+              </a:rPr>
+              <a:t>Quality Grade Distribution &amp; Freshness Profile</a:t>
+            </a:r>
+          </a:p>
+        </p:txBody>
+      </p:sp>
+      <p:pic>
+        <p:nvPicPr>
+          <p:cNvPr id="3" name="Picture 2" descr="03_grade_and_freshness_charts.png"/>
+          <p:cNvPicPr>
+            <a:picLocks noChangeAspect="1"/>
+          </p:cNvPicPr>
+          <p:nvPr/>
+        </p:nvPicPr>
+        <p:blipFill>
+          <a:blip r:embed="rId2"/>
+          <a:stretch>
+            <a:fillRect/>
+          </a:stretch>
+        </p:blipFill>
+        <p:spPr>
+          <a:xfrm>
+            <a:off x="731520" y="1371600"/>
+            <a:ext cx="6583680" cy="4114800"/>
+          </a:xfrm>
+          <a:prstGeom prst="rect">
+            <a:avLst/>
+          </a:prstGeom>
+        </p:spPr>
+      </p:pic>
+      <p:sp>
+        <p:nvSpPr>
+          <p:cNvPr id="4" name="Rectangle 3"/>
           <p:cNvSpPr/>
           <p:nvPr/>
         </p:nvSpPr>
         <p:spPr>
           <a:xfrm>
-            <a:off x="0" y="0"/>
-            <a:ext cx="12191695" cy="1097280"/>
+            <a:off x="7589520" y="1371600"/>
+            <a:ext cx="3840480" cy="4937760"/>
           </a:xfrm>
           <a:prstGeom prst="rect">
             <a:avLst/>
           </a:prstGeom>
           <a:solidFill>
-            <a:srgbClr val="0F172A"/>
+            <a:srgbClr val="FFFFFF"/>
           </a:solidFill>
-          <a:ln>
-            <a:noFill/>
+          <a:ln w="12700">
+            <a:solidFill>
+              <a:srgbClr val="E2E8F0"/>
+            </a:solidFill>
           </a:ln>
         </p:spPr>
         <p:style>
@@ -4427,14 +7675,14 @@
       </p:sp>
       <p:sp>
         <p:nvSpPr>
-          <p:cNvPr id="3" name="TextBox 2"/>
+          <p:cNvPr id="5" name="TextBox 4"/>
           <p:cNvSpPr txBox="1"/>
           <p:nvPr/>
         </p:nvSpPr>
         <p:spPr>
           <a:xfrm>
-            <a:off x="731520" y="137160"/>
-            <a:ext cx="10698480" cy="822960"/>
+            <a:off x="7772400" y="1554480"/>
+            <a:ext cx="3474720" cy="4572000"/>
           </a:xfrm>
           <a:prstGeom prst="rect">
             <a:avLst/>
@@ -4442,163 +7690,142 @@
           <a:noFill/>
         </p:spPr>
         <p:txBody>
-          <a:bodyPr wrap="square">
+          <a:bodyPr wrap="square" lIns="0" tIns="0" rIns="0" bIns="0">
             <a:spAutoFit/>
           </a:bodyPr>
           <a:lstStyle/>
           <a:p>
-            <a:pPr>
-              <a:defRPr sz="2400" b="1">
-                <a:solidFill>
-                  <a:srgbClr val="FFFFFF"/>
-                </a:solidFill>
-              </a:defRPr>
-            </a:pPr>
-            <a:r>
-              <a:t>6. Technology Stack &amp; Production Deployment</a:t>
-            </a:r>
-          </a:p>
-          <a:p>
-            <a:pPr>
-              <a:defRPr sz="1100">
-                <a:solidFill>
-                  <a:srgbClr val="94A3B8"/>
-                </a:solidFill>
-              </a:defRPr>
-            </a:pPr>
-            <a:r>
-              <a:t>Academic &amp; Industrial AI Project Series  |  Project 41 of 55</a:t>
-            </a:r>
-          </a:p>
-        </p:txBody>
-      </p:sp>
-      <p:sp>
-        <p:nvSpPr>
-          <p:cNvPr id="4" name="TextBox 3"/>
-          <p:cNvSpPr txBox="1"/>
-          <p:nvPr/>
-        </p:nvSpPr>
-        <p:spPr>
-          <a:xfrm>
-            <a:off x="731520" y="1371600"/>
-            <a:ext cx="10698480" cy="5029200"/>
-          </a:xfrm>
-          <a:prstGeom prst="rect">
-            <a:avLst/>
-          </a:prstGeom>
-          <a:noFill/>
-        </p:spPr>
-        <p:txBody>
-          <a:bodyPr wrap="square">
-            <a:spAutoFit/>
-          </a:bodyPr>
-          <a:lstStyle/>
+            <a:r>
+              <a:rPr b="1" sz="1400">
+                <a:solidFill>
+                  <a:srgbClr val="0F172A"/>
+                </a:solidFill>
+              </a:rPr>
+              <a:t>Comparative Analytics</a:t>
+            </a:r>
+          </a:p>
           <a:p>
             <a:pPr>
               <a:spcBef>
-                <a:spcPts val="800"/>
+                <a:spcPts val="600"/>
               </a:spcBef>
-              <a:defRPr sz="1500" b="1">
-                <a:solidFill>
-                  <a:srgbClr val="1E3A8A"/>
-                </a:solidFill>
-              </a:defRPr>
             </a:pPr>
             <a:r>
-              <a:t>⚙ Core Machine Learning Framework</a:t>
-            </a:r>
-          </a:p>
-          <a:p>
-            <a:pPr>
-              <a:defRPr sz="1300">
-                <a:solidFill>
-                  <a:srgbClr val="475569"/>
-                </a:solidFill>
-              </a:defRPr>
-            </a:pPr>
-            <a:r>
-              <a:t>PyTorch 2.0+ / Scikit-learn / HuggingFace Transformers / OpenCV</a:t>
+              <a:rPr b="1">
+                <a:solidFill>
+                  <a:srgbClr val="10B981"/>
+                </a:solidFill>
+              </a:rPr>
+              <a:t>• </a:t>
+            </a:r>
+            <a:r>
+              <a:rPr b="1" sz="1100">
+                <a:solidFill>
+                  <a:srgbClr val="1E293B"/>
+                </a:solidFill>
+              </a:rPr>
+              <a:t>Quality Grade Breakdown: </a:t>
+            </a:r>
+            <a:r>
+              <a:rPr sz="1100">
+                <a:solidFill>
+                  <a:srgbClr val="64748B"/>
+                </a:solidFill>
+              </a:rPr>
+              <a:t>Doughnut chart illustrating packhouse yields: 62.5% Grade A Export, 25.0% Grade B, 12.5% Reject.</a:t>
             </a:r>
           </a:p>
           <a:p>
             <a:pPr>
               <a:spcBef>
-                <a:spcPts val="800"/>
+                <a:spcPts val="600"/>
               </a:spcBef>
-              <a:defRPr sz="1500" b="1">
-                <a:solidFill>
-                  <a:srgbClr val="1E3A8A"/>
-                </a:solidFill>
-              </a:defRPr>
             </a:pPr>
             <a:r>
-              <a:t>⚙ Asynchronous REST Backend</a:t>
-            </a:r>
-          </a:p>
-          <a:p>
-            <a:pPr>
-              <a:defRPr sz="1300">
-                <a:solidFill>
-                  <a:srgbClr val="475569"/>
-                </a:solidFill>
-              </a:defRPr>
-            </a:pPr>
-            <a:r>
-              <a:t>FastAPI / Uvicorn ASGI Server / Pydantic V2 Type Safety</a:t>
+              <a:rPr b="1">
+                <a:solidFill>
+                  <a:srgbClr val="10B981"/>
+                </a:solidFill>
+              </a:rPr>
+              <a:t>• </a:t>
+            </a:r>
+            <a:r>
+              <a:rPr b="1" sz="1100">
+                <a:solidFill>
+                  <a:srgbClr val="1E293B"/>
+                </a:solidFill>
+              </a:rPr>
+              <a:t>Neural Freshness Profile: </a:t>
+            </a:r>
+            <a:r>
+              <a:rPr sz="1100">
+                <a:solidFill>
+                  <a:srgbClr val="64748B"/>
+                </a:solidFill>
+              </a:rPr>
+              <a:t>Multi-series bar chart correlating flesh firmness (Newtons) with soluble sugar Brix content.</a:t>
             </a:r>
           </a:p>
           <a:p>
             <a:pPr>
               <a:spcBef>
-                <a:spcPts val="800"/>
+                <a:spcPts val="600"/>
               </a:spcBef>
-              <a:defRPr sz="1500" b="1">
-                <a:solidFill>
-                  <a:srgbClr val="1E3A8A"/>
-                </a:solidFill>
-              </a:defRPr>
             </a:pPr>
             <a:r>
-              <a:t>⚙ Data Persistence &amp; Storage</a:t>
-            </a:r>
-          </a:p>
-          <a:p>
-            <a:pPr>
-              <a:defRPr sz="1300">
-                <a:solidFill>
-                  <a:srgbClr val="475569"/>
-                </a:solidFill>
-              </a:defRPr>
-            </a:pPr>
-            <a:r>
-              <a:t>SQLite / PostgreSQL with transactional integrity &amp; audit trail</a:t>
+              <a:rPr b="1">
+                <a:solidFill>
+                  <a:srgbClr val="10B981"/>
+                </a:solidFill>
+              </a:rPr>
+              <a:t>• </a:t>
+            </a:r>
+            <a:r>
+              <a:rPr b="1" sz="1100">
+                <a:solidFill>
+                  <a:srgbClr val="1E293B"/>
+                </a:solidFill>
+              </a:rPr>
+              <a:t>Dynamic Database Sync: </a:t>
+            </a:r>
+            <a:r>
+              <a:rPr sz="1100">
+                <a:solidFill>
+                  <a:srgbClr val="64748B"/>
+                </a:solidFill>
+              </a:rPr>
+              <a:t>Charts automatically update upon every conveyor inspection event via reactive JavaScript hooks.</a:t>
             </a:r>
           </a:p>
           <a:p>
             <a:pPr>
               <a:spcBef>
-                <a:spcPts val="800"/>
+                <a:spcPts val="600"/>
               </a:spcBef>
-              <a:defRPr sz="1500" b="1">
-                <a:solidFill>
-                  <a:srgbClr val="1E3A8A"/>
-                </a:solidFill>
-              </a:defRPr>
             </a:pPr>
             <a:r>
-              <a:t>⚙ Interactive Frontend Layer</a:t>
-            </a:r>
-          </a:p>
-          <a:p>
-            <a:pPr>
-              <a:defRPr sz="1300">
-                <a:solidFill>
-                  <a:srgbClr val="475569"/>
-                </a:solidFill>
-              </a:defRPr>
-            </a:pPr>
-            <a:r>
-              <a:t>Modern Responsive Web Portal (HTML5, Tailwind/CSS, JavaScript ES6+)</a:t>
+              <a:rPr b="1">
+                <a:solidFill>
+                  <a:srgbClr val="10B981"/>
+                </a:solidFill>
+              </a:rPr>
+              <a:t>• </a:t>
+            </a:r>
+            <a:r>
+              <a:rPr b="1" sz="1100">
+                <a:solidFill>
+                  <a:srgbClr val="1E293B"/>
+                </a:solidFill>
+              </a:rPr>
+              <a:t>Defect Ratio Correlation: </a:t>
+            </a:r>
+            <a:r>
+              <a:rPr sz="1100">
+                <a:solidFill>
+                  <a:srgbClr val="64748B"/>
+                </a:solidFill>
+              </a:rPr>
+              <a:t>Instant visualization of surface lesion impact on commercial economic quality scores.</a:t>
             </a:r>
           </a:p>
         </p:txBody>
@@ -4623,23 +7850,92 @@
       <p:grpSpPr/>
       <p:sp>
         <p:nvSpPr>
-          <p:cNvPr id="2" name="Rectangle 1"/>
+          <p:cNvPr id="2" name="TextBox 1"/>
+          <p:cNvSpPr txBox="1"/>
+          <p:nvPr/>
+        </p:nvSpPr>
+        <p:spPr>
+          <a:xfrm>
+            <a:off x="731520" y="365760"/>
+            <a:ext cx="10728655" cy="822960"/>
+          </a:xfrm>
+          <a:prstGeom prst="rect">
+            <a:avLst/>
+          </a:prstGeom>
+          <a:noFill/>
+        </p:spPr>
+        <p:txBody>
+          <a:bodyPr wrap="square" lIns="0" tIns="0" rIns="0" bIns="0">
+            <a:spAutoFit/>
+          </a:bodyPr>
+          <a:lstStyle/>
+          <a:p>
+            <a:r>
+              <a:rPr b="1" sz="1000">
+                <a:solidFill>
+                  <a:srgbClr val="10B981"/>
+                </a:solidFill>
+              </a:rPr>
+              <a:t>PACKAGING CASE STUDY • PROJECT-041</a:t>
+            </a:r>
+          </a:p>
+          <a:p>
+            <a:r>
+              <a:rPr b="1" sz="2000">
+                <a:solidFill>
+                  <a:srgbClr val="0F172A"/>
+                </a:solidFill>
+              </a:rPr>
+              <a:t>Apple Optical Inspection &amp; Grade A Export Sorting</a:t>
+            </a:r>
+          </a:p>
+        </p:txBody>
+      </p:sp>
+      <p:pic>
+        <p:nvPicPr>
+          <p:cNvPr id="3" name="Picture 2" descr="04_apple_grade_a_export_inspection.png"/>
+          <p:cNvPicPr>
+            <a:picLocks noChangeAspect="1"/>
+          </p:cNvPicPr>
+          <p:nvPr/>
+        </p:nvPicPr>
+        <p:blipFill>
+          <a:blip r:embed="rId2"/>
+          <a:stretch>
+            <a:fillRect/>
+          </a:stretch>
+        </p:blipFill>
+        <p:spPr>
+          <a:xfrm>
+            <a:off x="731520" y="1371600"/>
+            <a:ext cx="6583680" cy="4114800"/>
+          </a:xfrm>
+          <a:prstGeom prst="rect">
+            <a:avLst/>
+          </a:prstGeom>
+        </p:spPr>
+      </p:pic>
+      <p:sp>
+        <p:nvSpPr>
+          <p:cNvPr id="4" name="Rectangle 3"/>
           <p:cNvSpPr/>
           <p:nvPr/>
         </p:nvSpPr>
         <p:spPr>
           <a:xfrm>
-            <a:off x="0" y="0"/>
-            <a:ext cx="12191695" cy="1097280"/>
+            <a:off x="7589520" y="1371600"/>
+            <a:ext cx="3840480" cy="4937760"/>
           </a:xfrm>
           <a:prstGeom prst="rect">
             <a:avLst/>
           </a:prstGeom>
           <a:solidFill>
-            <a:srgbClr val="0F172A"/>
+            <a:srgbClr val="FFFFFF"/>
           </a:solidFill>
-          <a:ln>
-            <a:noFill/>
+          <a:ln w="12700">
+            <a:solidFill>
+              <a:srgbClr val="E2E8F0"/>
+            </a:solidFill>
           </a:ln>
         </p:spPr>
         <p:style>
@@ -4666,14 +7962,14 @@
       </p:sp>
       <p:sp>
         <p:nvSpPr>
-          <p:cNvPr id="3" name="TextBox 2"/>
+          <p:cNvPr id="5" name="TextBox 4"/>
           <p:cNvSpPr txBox="1"/>
           <p:nvPr/>
         </p:nvSpPr>
         <p:spPr>
           <a:xfrm>
-            <a:off x="731520" y="137160"/>
-            <a:ext cx="10698480" cy="822960"/>
+            <a:off x="7772400" y="1554480"/>
+            <a:ext cx="3474720" cy="4572000"/>
           </a:xfrm>
           <a:prstGeom prst="rect">
             <a:avLst/>
@@ -4681,46 +7977,174 @@
           <a:noFill/>
         </p:spPr>
         <p:txBody>
-          <a:bodyPr wrap="square">
+          <a:bodyPr wrap="square" lIns="0" tIns="0" rIns="0" bIns="0">
             <a:spAutoFit/>
           </a:bodyPr>
           <a:lstStyle/>
           <a:p>
+            <a:r>
+              <a:rPr b="1" sz="1400">
+                <a:solidFill>
+                  <a:srgbClr val="0F172A"/>
+                </a:solidFill>
+              </a:rPr>
+              <a:t>Premium Grade A Sorting</a:t>
+            </a:r>
+          </a:p>
+          <a:p>
             <a:pPr>
-              <a:defRPr sz="2400" b="1">
-                <a:solidFill>
-                  <a:srgbClr val="FFFFFF"/>
-                </a:solidFill>
-              </a:defRPr>
+              <a:spcBef>
+                <a:spcPts val="600"/>
+              </a:spcBef>
             </a:pPr>
             <a:r>
-              <a:t>7. Conclusion &amp; Future Roadmap</a:t>
+              <a:rPr b="1">
+                <a:solidFill>
+                  <a:srgbClr val="10B981"/>
+                </a:solidFill>
+              </a:rPr>
+              <a:t>• </a:t>
+            </a:r>
+            <a:r>
+              <a:rPr b="1" sz="1100">
+                <a:solidFill>
+                  <a:srgbClr val="1E293B"/>
+                </a:solidFill>
+              </a:rPr>
+              <a:t>Botanical Identification: </a:t>
+            </a:r>
+            <a:r>
+              <a:rPr sz="1100">
+                <a:solidFill>
+                  <a:srgbClr val="64748B"/>
+                </a:solidFill>
+              </a:rPr>
+              <a:t>Malus domestica classified with 99.2% confidence on Lane 1 conveyor belt.</a:t>
             </a:r>
           </a:p>
           <a:p>
             <a:pPr>
-              <a:defRPr sz="1100">
-                <a:solidFill>
-                  <a:srgbClr val="94A3B8"/>
-                </a:solidFill>
-              </a:defRPr>
+              <a:spcBef>
+                <a:spcPts val="600"/>
+              </a:spcBef>
             </a:pPr>
             <a:r>
-              <a:t>Academic &amp; Industrial AI Project Series  |  Project 41 of 55</a:t>
-            </a:r>
-          </a:p>
-        </p:txBody>
-      </p:sp>
-      <p:sp>
-        <p:nvSpPr>
-          <p:cNvPr id="4" name="TextBox 3"/>
+              <a:rPr b="1">
+                <a:solidFill>
+                  <a:srgbClr val="10B981"/>
+                </a:solidFill>
+              </a:rPr>
+              <a:t>• </a:t>
+            </a:r>
+            <a:r>
+              <a:rPr b="1" sz="1100">
+                <a:solidFill>
+                  <a:srgbClr val="1E293B"/>
+                </a:solidFill>
+              </a:rPr>
+              <a:t>Zero Lesion Surface: </a:t>
+            </a:r>
+            <a:r>
+              <a:rPr sz="1100">
+                <a:solidFill>
+                  <a:srgbClr val="64748B"/>
+                </a:solidFill>
+              </a:rPr>
+              <a:t>0.0% surface defect ratio triggering GRADE_A_PREMIUM classification.</a:t>
+            </a:r>
+          </a:p>
+          <a:p>
+            <a:pPr>
+              <a:spcBef>
+                <a:spcPts val="600"/>
+              </a:spcBef>
+            </a:pPr>
+            <a:r>
+              <a:rPr b="1">
+                <a:solidFill>
+                  <a:srgbClr val="10B981"/>
+                </a:solidFill>
+              </a:rPr>
+              <a:t>• </a:t>
+            </a:r>
+            <a:r>
+              <a:rPr b="1" sz="1100">
+                <a:solidFill>
+                  <a:srgbClr val="1E293B"/>
+                </a:solidFill>
+              </a:rPr>
+              <a:t>Pneumatic Chute Routing: </a:t>
+            </a:r>
+            <a:r>
+              <a:rPr sz="1100">
+                <a:solidFill>
+                  <a:srgbClr val="64748B"/>
+                </a:solidFill>
+              </a:rPr>
+              <a:t>Pneumatic diverter directs fruit to BIN_1_EXPORT for premium international shipment.</a:t>
+            </a:r>
+          </a:p>
+          <a:p>
+            <a:pPr>
+              <a:spcBef>
+                <a:spcPts val="600"/>
+              </a:spcBef>
+            </a:pPr>
+            <a:r>
+              <a:rPr b="1">
+                <a:solidFill>
+                  <a:srgbClr val="10B981"/>
+                </a:solidFill>
+              </a:rPr>
+              <a:t>• </a:t>
+            </a:r>
+            <a:r>
+              <a:rPr b="1" sz="1100">
+                <a:solidFill>
+                  <a:srgbClr val="1E293B"/>
+                </a:solidFill>
+              </a:rPr>
+              <a:t>Freshness Parameter Output: </a:t>
+            </a:r>
+            <a:r>
+              <a:rPr sz="1100">
+                <a:solidFill>
+                  <a:srgbClr val="64748B"/>
+                </a:solidFill>
+              </a:rPr>
+              <a:t>Firmness: 84.5 N | Brix: 16.5% | Shelf Life: 24.0 Days | Economic Score: 96.5 pts.</a:t>
+            </a:r>
+          </a:p>
+        </p:txBody>
+      </p:sp>
+    </p:spTree>
+  </p:cSld>
+  <p:clrMapOvr>
+    <a:masterClrMapping/>
+  </p:clrMapOvr>
+</p:sld>
+</file>
+
+<file path=ppt/slides/slide9.xml><?xml version="1.0" encoding="utf-8"?>
+<p:sld xmlns:a="http://schemas.openxmlformats.org/drawingml/2006/main" xmlns:p="http://schemas.openxmlformats.org/presentationml/2006/main" xmlns:r="http://schemas.openxmlformats.org/officeDocument/2006/relationships">
+  <p:cSld>
+    <p:spTree>
+      <p:nvGrpSpPr>
+        <p:cNvPr id="1" name=""/>
+        <p:cNvGrpSpPr/>
+        <p:nvPr/>
+      </p:nvGrpSpPr>
+      <p:grpSpPr/>
+      <p:sp>
+        <p:nvSpPr>
+          <p:cNvPr id="2" name="TextBox 1"/>
           <p:cNvSpPr txBox="1"/>
           <p:nvPr/>
         </p:nvSpPr>
         <p:spPr>
           <a:xfrm>
-            <a:off x="731520" y="1371600"/>
-            <a:ext cx="10698480" cy="5029200"/>
+            <a:off x="731520" y="365760"/>
+            <a:ext cx="10728655" cy="822960"/>
           </a:xfrm>
           <a:prstGeom prst="rect">
             <a:avLst/>
@@ -4728,89 +8152,254 @@
           <a:noFill/>
         </p:spPr>
         <p:txBody>
-          <a:bodyPr wrap="square">
+          <a:bodyPr wrap="square" lIns="0" tIns="0" rIns="0" bIns="0">
             <a:spAutoFit/>
           </a:bodyPr>
           <a:lstStyle/>
           <a:p>
+            <a:r>
+              <a:rPr b="1" sz="1000">
+                <a:solidFill>
+                  <a:srgbClr val="10B981"/>
+                </a:solidFill>
+              </a:rPr>
+              <a:t>DEFECT REJECTION • PROJECT-041</a:t>
+            </a:r>
+          </a:p>
+          <a:p>
+            <a:r>
+              <a:rPr b="1" sz="2000">
+                <a:solidFill>
+                  <a:srgbClr val="0F172A"/>
+                </a:solidFill>
+              </a:rPr>
+              <a:t>Orange Surface Defect Detection &amp; Discard Routing</a:t>
+            </a:r>
+          </a:p>
+        </p:txBody>
+      </p:sp>
+      <p:pic>
+        <p:nvPicPr>
+          <p:cNvPr id="3" name="Picture 2" descr="05_orange_skin_rot_defect_reject.png"/>
+          <p:cNvPicPr>
+            <a:picLocks noChangeAspect="1"/>
+          </p:cNvPicPr>
+          <p:nvPr/>
+        </p:nvPicPr>
+        <p:blipFill>
+          <a:blip r:embed="rId2"/>
+          <a:stretch>
+            <a:fillRect/>
+          </a:stretch>
+        </p:blipFill>
+        <p:spPr>
+          <a:xfrm>
+            <a:off x="731520" y="1371600"/>
+            <a:ext cx="6583680" cy="4114800"/>
+          </a:xfrm>
+          <a:prstGeom prst="rect">
+            <a:avLst/>
+          </a:prstGeom>
+        </p:spPr>
+      </p:pic>
+      <p:sp>
+        <p:nvSpPr>
+          <p:cNvPr id="4" name="Rectangle 3"/>
+          <p:cNvSpPr/>
+          <p:nvPr/>
+        </p:nvSpPr>
+        <p:spPr>
+          <a:xfrm>
+            <a:off x="7589520" y="1371600"/>
+            <a:ext cx="3840480" cy="4937760"/>
+          </a:xfrm>
+          <a:prstGeom prst="rect">
+            <a:avLst/>
+          </a:prstGeom>
+          <a:solidFill>
+            <a:srgbClr val="FFFFFF"/>
+          </a:solidFill>
+          <a:ln w="12700">
+            <a:solidFill>
+              <a:srgbClr val="E2E8F0"/>
+            </a:solidFill>
+          </a:ln>
+        </p:spPr>
+        <p:style>
+          <a:lnRef idx="1">
+            <a:schemeClr val="accent1"/>
+          </a:lnRef>
+          <a:fillRef idx="3">
+            <a:schemeClr val="accent1"/>
+          </a:fillRef>
+          <a:effectRef idx="2">
+            <a:schemeClr val="accent1"/>
+          </a:effectRef>
+          <a:fontRef idx="minor">
+            <a:schemeClr val="lt1"/>
+          </a:fontRef>
+        </p:style>
+        <p:txBody>
+          <a:bodyPr rtlCol="0" anchor="ctr"/>
+          <a:lstStyle/>
+          <a:p>
+            <a:pPr algn="ctr"/>
+          </a:p>
+        </p:txBody>
+      </p:sp>
+      <p:sp>
+        <p:nvSpPr>
+          <p:cNvPr id="5" name="TextBox 4"/>
+          <p:cNvSpPr txBox="1"/>
+          <p:nvPr/>
+        </p:nvSpPr>
+        <p:spPr>
+          <a:xfrm>
+            <a:off x="7772400" y="1554480"/>
+            <a:ext cx="3474720" cy="4572000"/>
+          </a:xfrm>
+          <a:prstGeom prst="rect">
+            <a:avLst/>
+          </a:prstGeom>
+          <a:noFill/>
+        </p:spPr>
+        <p:txBody>
+          <a:bodyPr wrap="square" lIns="0" tIns="0" rIns="0" bIns="0">
+            <a:spAutoFit/>
+          </a:bodyPr>
+          <a:lstStyle/>
+          <a:p>
+            <a:r>
+              <a:rPr b="1" sz="1400">
+                <a:solidFill>
+                  <a:srgbClr val="0F172A"/>
+                </a:solidFill>
+              </a:rPr>
+              <a:t>Pathological Defect Rejection</a:t>
+            </a:r>
+          </a:p>
+          <a:p>
             <a:pPr>
               <a:spcBef>
-                <a:spcPts val="1000"/>
+                <a:spcPts val="600"/>
               </a:spcBef>
-              <a:defRPr sz="1500" b="1">
-                <a:solidFill>
-                  <a:srgbClr val="0F172A"/>
-                </a:solidFill>
-              </a:defRPr>
             </a:pPr>
             <a:r>
-              <a:t>■ Project Accomplishments</a:t>
-            </a:r>
-          </a:p>
-          <a:p>
-            <a:pPr>
-              <a:defRPr sz="1300">
-                <a:solidFill>
-                  <a:srgbClr val="475569"/>
-                </a:solidFill>
-              </a:defRPr>
-            </a:pPr>
-            <a:r>
-              <a:t>Engineered a robust, end-to-end prototype validating the initial abstract with reproducible experiments.</a:t>
+              <a:rPr b="1">
+                <a:solidFill>
+                  <a:srgbClr val="10B981"/>
+                </a:solidFill>
+              </a:rPr>
+              <a:t>• </a:t>
+            </a:r>
+            <a:r>
+              <a:rPr b="1" sz="1100">
+                <a:solidFill>
+                  <a:srgbClr val="1E293B"/>
+                </a:solidFill>
+              </a:rPr>
+              <a:t>Pathological Lesion Identified: </a:t>
+            </a:r>
+            <a:r>
+              <a:rPr sz="1100">
+                <a:solidFill>
+                  <a:srgbClr val="64748B"/>
+                </a:solidFill>
+              </a:rPr>
+              <a:t>Skin rot detected across 16.8% of fruit surface area under optical scanning.</a:t>
             </a:r>
           </a:p>
           <a:p>
             <a:pPr>
               <a:spcBef>
-                <a:spcPts val="1000"/>
+                <a:spcPts val="600"/>
               </a:spcBef>
-              <a:defRPr sz="1500" b="1">
-                <a:solidFill>
-                  <a:srgbClr val="0F172A"/>
-                </a:solidFill>
-              </a:defRPr>
             </a:pPr>
             <a:r>
-              <a:t>■ Industrial Significance</a:t>
-            </a:r>
-          </a:p>
-          <a:p>
-            <a:pPr>
-              <a:defRPr sz="1300">
-                <a:solidFill>
-                  <a:srgbClr val="475569"/>
-                </a:solidFill>
-              </a:defRPr>
-            </a:pPr>
-            <a:r>
-              <a:t>Eliminates latency and manual friction while ensuring high confidence automated decision support.</a:t>
+              <a:rPr b="1">
+                <a:solidFill>
+                  <a:srgbClr val="10B981"/>
+                </a:solidFill>
+              </a:rPr>
+              <a:t>• </a:t>
+            </a:r>
+            <a:r>
+              <a:rPr b="1" sz="1100">
+                <a:solidFill>
+                  <a:srgbClr val="1E293B"/>
+                </a:solidFill>
+              </a:rPr>
+              <a:t>Instant Downgrade to Reject: </a:t>
+            </a:r>
+            <a:r>
+              <a:rPr sz="1100">
+                <a:solidFill>
+                  <a:srgbClr val="64748B"/>
+                </a:solidFill>
+              </a:rPr>
+              <a:t>Classified as GRADE_C_REJECT with zero latency delay to prevent batch contamination.</a:t>
             </a:r>
           </a:p>
           <a:p>
             <a:pPr>
               <a:spcBef>
-                <a:spcPts val="1000"/>
+                <a:spcPts val="600"/>
               </a:spcBef>
-              <a:defRPr sz="1500" b="1">
-                <a:solidFill>
-                  <a:srgbClr val="0F172A"/>
-                </a:solidFill>
-              </a:defRPr>
             </a:pPr>
             <a:r>
-              <a:t>■ Future Scope &amp; Extensions</a:t>
+              <a:rPr b="1">
+                <a:solidFill>
+                  <a:srgbClr val="10B981"/>
+                </a:solidFill>
+              </a:rPr>
+              <a:t>• </a:t>
+            </a:r>
+            <a:r>
+              <a:rPr b="1" sz="1100">
+                <a:solidFill>
+                  <a:srgbClr val="1E293B"/>
+                </a:solidFill>
+              </a:rPr>
+              <a:t>Chute Diverter Actuation: </a:t>
+            </a:r>
+            <a:r>
+              <a:rPr sz="1100">
+                <a:solidFill>
+                  <a:srgbClr val="64748B"/>
+                </a:solidFill>
+              </a:rPr>
+              <a:t>Pneumatic arm actuates, diverting fruit into BIN_3_DISCARD / Processing bin.</a:t>
             </a:r>
           </a:p>
           <a:p>
             <a:pPr>
-              <a:defRPr sz="1300">
-                <a:solidFill>
-                  <a:srgbClr val="475569"/>
-                </a:solidFill>
-              </a:defRPr>
+              <a:spcBef>
+                <a:spcPts val="600"/>
+              </a:spcBef>
             </a:pPr>
             <a:r>
-              <a:t>Integration with federated edge sensors, distributed multi-tenant cloud clustering, and automated active learning.</a:t>
+              <a:rPr b="1">
+                <a:solidFill>
+                  <a:srgbClr val="10B981"/>
+                </a:solidFill>
+              </a:rPr>
+              <a:t>• </a:t>
+            </a:r>
+            <a:r>
+              <a:rPr b="1" sz="1100">
+                <a:solidFill>
+                  <a:srgbClr val="1E293B"/>
+                </a:solidFill>
+              </a:rPr>
+              <a:t>Degraded Freshness Forecast: </a:t>
+            </a:r>
+            <a:r>
+              <a:rPr sz="1100">
+                <a:solidFill>
+                  <a:srgbClr val="64748B"/>
+                </a:solidFill>
+              </a:rPr>
+              <a:t>Firmness: 28.0 N | Shelf Life: 2.0 Days | Economic Score: 28.5 pts.</a:t>
             </a:r>
           </a:p>
         </p:txBody>
